--- a/docs/Project_Presentation.pptx
+++ b/docs/Project_Presentation.pptx
@@ -5,28 +5,28 @@
     <p:sldMasterId id="2147483648" r:id="rId1"/>
   </p:sldMasterIdLst>
   <p:sldIdLst>
-    <p:sldId id="256" r:id="rId7"/>
-    <p:sldId id="257" r:id="rId8"/>
-    <p:sldId id="258" r:id="rId9"/>
-    <p:sldId id="259" r:id="rId10"/>
-    <p:sldId id="260" r:id="rId11"/>
-    <p:sldId id="261" r:id="rId12"/>
-    <p:sldId id="262" r:id="rId13"/>
-    <p:sldId id="263" r:id="rId14"/>
-    <p:sldId id="264" r:id="rId15"/>
-    <p:sldId id="265" r:id="rId16"/>
-    <p:sldId id="266" r:id="rId17"/>
-    <p:sldId id="267" r:id="rId18"/>
-    <p:sldId id="268" r:id="rId19"/>
-    <p:sldId id="269" r:id="rId20"/>
-    <p:sldId id="270" r:id="rId21"/>
-    <p:sldId id="271" r:id="rId22"/>
-    <p:sldId id="272" r:id="rId23"/>
-    <p:sldId id="273" r:id="rId24"/>
-    <p:sldId id="274" r:id="rId25"/>
-    <p:sldId id="275" r:id="rId26"/>
+    <p:sldId id="256" r:id="rId2"/>
+    <p:sldId id="257" r:id="rId3"/>
+    <p:sldId id="258" r:id="rId4"/>
+    <p:sldId id="259" r:id="rId5"/>
+    <p:sldId id="260" r:id="rId6"/>
+    <p:sldId id="261" r:id="rId7"/>
+    <p:sldId id="262" r:id="rId8"/>
+    <p:sldId id="263" r:id="rId9"/>
+    <p:sldId id="264" r:id="rId10"/>
+    <p:sldId id="265" r:id="rId11"/>
+    <p:sldId id="266" r:id="rId12"/>
+    <p:sldId id="267" r:id="rId13"/>
+    <p:sldId id="268" r:id="rId14"/>
+    <p:sldId id="269" r:id="rId15"/>
+    <p:sldId id="270" r:id="rId16"/>
+    <p:sldId id="271" r:id="rId17"/>
+    <p:sldId id="272" r:id="rId18"/>
+    <p:sldId id="273" r:id="rId19"/>
+    <p:sldId id="274" r:id="rId20"/>
+    <p:sldId id="275" r:id="rId21"/>
   </p:sldIdLst>
-  <p:sldSz cx="12191695" cy="6858000" type="screen4x3"/>
+  <p:sldSz cx="12192000" cy="6858000"/>
   <p:notesSz cx="6858000" cy="9144000"/>
   <p:defaultTextStyle>
     <a:defPPr>
@@ -123,6 +123,22 @@
       </a:defRPr>
     </a:lvl9pPr>
   </p:defaultTextStyle>
+  <p:extLst>
+    <p:ext uri="{EFAFB233-063F-42B5-8137-9DF3F51BA10A}">
+      <p15:sldGuideLst xmlns:p15="http://schemas.microsoft.com/office/powerpoint/2012/main">
+        <p15:guide id="1" orient="horz" pos="2160">
+          <p15:clr>
+            <a:srgbClr val="A4A3A4"/>
+          </p15:clr>
+        </p15:guide>
+        <p15:guide id="2" pos="2880">
+          <p15:clr>
+            <a:srgbClr val="A4A3A4"/>
+          </p15:clr>
+        </p15:guide>
+      </p15:sldGuideLst>
+    </p:ext>
+  </p:extLst>
 </p:presentation>
 </file>
 
@@ -164,10 +180,9 @@
           <a:lstStyle/>
           <a:p>
             <a:r>
-              <a:rPr lang="en-US" smtClean="0"/>
+              <a:rPr lang="en-US"/>
               <a:t>Click to edit Master title style</a:t>
             </a:r>
-            <a:endParaRPr lang="en-US"/>
           </a:p>
         </p:txBody>
       </p:sp>
@@ -283,10 +298,9 @@
           </a:lstStyle>
           <a:p>
             <a:r>
-              <a:rPr lang="en-US" smtClean="0"/>
+              <a:rPr lang="en-US"/>
               <a:t>Click to edit Master subtitle style</a:t>
             </a:r>
-            <a:endParaRPr lang="en-US"/>
           </a:p>
         </p:txBody>
       </p:sp>
@@ -307,7 +321,7 @@
           <a:p>
             <a:fld id="{5BCAD085-E8A6-8845-BD4E-CB4CCA059FC4}" type="datetimeFigureOut">
               <a:rPr lang="en-US" smtClean="0"/>
-              <a:t>1/27/13</a:t>
+              <a:t>10/29/2026</a:t>
             </a:fld>
             <a:endParaRPr lang="en-US"/>
           </a:p>
@@ -401,10 +415,9 @@
           <a:lstStyle/>
           <a:p>
             <a:r>
-              <a:rPr lang="en-US" smtClean="0"/>
+              <a:rPr lang="en-US"/>
               <a:t>Click to edit Master title style</a:t>
             </a:r>
-            <a:endParaRPr lang="en-US"/>
           </a:p>
         </p:txBody>
       </p:sp>
@@ -425,38 +438,37 @@
           <a:p>
             <a:pPr lvl="0"/>
             <a:r>
-              <a:rPr lang="en-US" smtClean="0"/>
+              <a:rPr lang="en-US"/>
               <a:t>Click to edit Master text styles</a:t>
             </a:r>
           </a:p>
           <a:p>
             <a:pPr lvl="1"/>
             <a:r>
-              <a:rPr lang="en-US" smtClean="0"/>
+              <a:rPr lang="en-US"/>
               <a:t>Second level</a:t>
             </a:r>
           </a:p>
           <a:p>
             <a:pPr lvl="2"/>
             <a:r>
-              <a:rPr lang="en-US" smtClean="0"/>
+              <a:rPr lang="en-US"/>
               <a:t>Third level</a:t>
             </a:r>
           </a:p>
           <a:p>
             <a:pPr lvl="3"/>
             <a:r>
-              <a:rPr lang="en-US" smtClean="0"/>
+              <a:rPr lang="en-US"/>
               <a:t>Fourth level</a:t>
             </a:r>
           </a:p>
           <a:p>
             <a:pPr lvl="4"/>
             <a:r>
-              <a:rPr lang="en-US" smtClean="0"/>
+              <a:rPr lang="en-US"/>
               <a:t>Fifth level</a:t>
             </a:r>
-            <a:endParaRPr lang="en-US"/>
           </a:p>
         </p:txBody>
       </p:sp>
@@ -477,7 +489,7 @@
           <a:p>
             <a:fld id="{5BCAD085-E8A6-8845-BD4E-CB4CCA059FC4}" type="datetimeFigureOut">
               <a:rPr lang="en-US" smtClean="0"/>
-              <a:t>1/27/13</a:t>
+              <a:t>10/29/2026</a:t>
             </a:fld>
             <a:endParaRPr lang="en-US"/>
           </a:p>
@@ -576,10 +588,9 @@
           <a:lstStyle/>
           <a:p>
             <a:r>
-              <a:rPr lang="en-US" smtClean="0"/>
+              <a:rPr lang="en-US"/>
               <a:t>Click to edit Master title style</a:t>
             </a:r>
-            <a:endParaRPr lang="en-US"/>
           </a:p>
         </p:txBody>
       </p:sp>
@@ -605,38 +616,37 @@
           <a:p>
             <a:pPr lvl="0"/>
             <a:r>
-              <a:rPr lang="en-US" smtClean="0"/>
+              <a:rPr lang="en-US"/>
               <a:t>Click to edit Master text styles</a:t>
             </a:r>
           </a:p>
           <a:p>
             <a:pPr lvl="1"/>
             <a:r>
-              <a:rPr lang="en-US" smtClean="0"/>
+              <a:rPr lang="en-US"/>
               <a:t>Second level</a:t>
             </a:r>
           </a:p>
           <a:p>
             <a:pPr lvl="2"/>
             <a:r>
-              <a:rPr lang="en-US" smtClean="0"/>
+              <a:rPr lang="en-US"/>
               <a:t>Third level</a:t>
             </a:r>
           </a:p>
           <a:p>
             <a:pPr lvl="3"/>
             <a:r>
-              <a:rPr lang="en-US" smtClean="0"/>
+              <a:rPr lang="en-US"/>
               <a:t>Fourth level</a:t>
             </a:r>
           </a:p>
           <a:p>
             <a:pPr lvl="4"/>
             <a:r>
-              <a:rPr lang="en-US" smtClean="0"/>
+              <a:rPr lang="en-US"/>
               <a:t>Fifth level</a:t>
             </a:r>
-            <a:endParaRPr lang="en-US"/>
           </a:p>
         </p:txBody>
       </p:sp>
@@ -657,7 +667,7 @@
           <a:p>
             <a:fld id="{5BCAD085-E8A6-8845-BD4E-CB4CCA059FC4}" type="datetimeFigureOut">
               <a:rPr lang="en-US" smtClean="0"/>
-              <a:t>1/27/13</a:t>
+              <a:t>10/29/2026</a:t>
             </a:fld>
             <a:endParaRPr lang="en-US"/>
           </a:p>
@@ -751,10 +761,9 @@
           <a:lstStyle/>
           <a:p>
             <a:r>
-              <a:rPr lang="en-US" smtClean="0"/>
+              <a:rPr lang="en-US"/>
               <a:t>Click to edit Master title style</a:t>
             </a:r>
-            <a:endParaRPr lang="en-US"/>
           </a:p>
         </p:txBody>
       </p:sp>
@@ -775,38 +784,37 @@
           <a:p>
             <a:pPr lvl="0"/>
             <a:r>
-              <a:rPr lang="en-US" smtClean="0"/>
+              <a:rPr lang="en-US"/>
               <a:t>Click to edit Master text styles</a:t>
             </a:r>
           </a:p>
           <a:p>
             <a:pPr lvl="1"/>
             <a:r>
-              <a:rPr lang="en-US" smtClean="0"/>
+              <a:rPr lang="en-US"/>
               <a:t>Second level</a:t>
             </a:r>
           </a:p>
           <a:p>
             <a:pPr lvl="2"/>
             <a:r>
-              <a:rPr lang="en-US" smtClean="0"/>
+              <a:rPr lang="en-US"/>
               <a:t>Third level</a:t>
             </a:r>
           </a:p>
           <a:p>
             <a:pPr lvl="3"/>
             <a:r>
-              <a:rPr lang="en-US" smtClean="0"/>
+              <a:rPr lang="en-US"/>
               <a:t>Fourth level</a:t>
             </a:r>
           </a:p>
           <a:p>
             <a:pPr lvl="4"/>
             <a:r>
-              <a:rPr lang="en-US" smtClean="0"/>
+              <a:rPr lang="en-US"/>
               <a:t>Fifth level</a:t>
             </a:r>
-            <a:endParaRPr lang="en-US"/>
           </a:p>
         </p:txBody>
       </p:sp>
@@ -827,7 +835,7 @@
           <a:p>
             <a:fld id="{5BCAD085-E8A6-8845-BD4E-CB4CCA059FC4}" type="datetimeFigureOut">
               <a:rPr lang="en-US" smtClean="0"/>
-              <a:t>1/27/13</a:t>
+              <a:t>10/29/2026</a:t>
             </a:fld>
             <a:endParaRPr lang="en-US"/>
           </a:p>
@@ -930,10 +938,9 @@
           </a:lstStyle>
           <a:p>
             <a:r>
-              <a:rPr lang="en-US" smtClean="0"/>
+              <a:rPr lang="en-US"/>
               <a:t>Click to edit Master title style</a:t>
             </a:r>
-            <a:endParaRPr lang="en-US"/>
           </a:p>
         </p:txBody>
       </p:sp>
@@ -1050,7 +1057,7 @@
           <a:p>
             <a:pPr lvl="0"/>
             <a:r>
-              <a:rPr lang="en-US" smtClean="0"/>
+              <a:rPr lang="en-US"/>
               <a:t>Click to edit Master text styles</a:t>
             </a:r>
           </a:p>
@@ -1073,7 +1080,7 @@
           <a:p>
             <a:fld id="{5BCAD085-E8A6-8845-BD4E-CB4CCA059FC4}" type="datetimeFigureOut">
               <a:rPr lang="en-US" smtClean="0"/>
-              <a:t>1/27/13</a:t>
+              <a:t>10/29/2026</a:t>
             </a:fld>
             <a:endParaRPr lang="en-US"/>
           </a:p>
@@ -1167,10 +1174,9 @@
           <a:lstStyle/>
           <a:p>
             <a:r>
-              <a:rPr lang="en-US" smtClean="0"/>
+              <a:rPr lang="en-US"/>
               <a:t>Click to edit Master title style</a:t>
             </a:r>
-            <a:endParaRPr lang="en-US"/>
           </a:p>
         </p:txBody>
       </p:sp>
@@ -1224,38 +1230,37 @@
           <a:p>
             <a:pPr lvl="0"/>
             <a:r>
-              <a:rPr lang="en-US" smtClean="0"/>
+              <a:rPr lang="en-US"/>
               <a:t>Click to edit Master text styles</a:t>
             </a:r>
           </a:p>
           <a:p>
             <a:pPr lvl="1"/>
             <a:r>
-              <a:rPr lang="en-US" smtClean="0"/>
+              <a:rPr lang="en-US"/>
               <a:t>Second level</a:t>
             </a:r>
           </a:p>
           <a:p>
             <a:pPr lvl="2"/>
             <a:r>
-              <a:rPr lang="en-US" smtClean="0"/>
+              <a:rPr lang="en-US"/>
               <a:t>Third level</a:t>
             </a:r>
           </a:p>
           <a:p>
             <a:pPr lvl="3"/>
             <a:r>
-              <a:rPr lang="en-US" smtClean="0"/>
+              <a:rPr lang="en-US"/>
               <a:t>Fourth level</a:t>
             </a:r>
           </a:p>
           <a:p>
             <a:pPr lvl="4"/>
             <a:r>
-              <a:rPr lang="en-US" smtClean="0"/>
+              <a:rPr lang="en-US"/>
               <a:t>Fifth level</a:t>
             </a:r>
-            <a:endParaRPr lang="en-US"/>
           </a:p>
         </p:txBody>
       </p:sp>
@@ -1309,38 +1314,37 @@
           <a:p>
             <a:pPr lvl="0"/>
             <a:r>
-              <a:rPr lang="en-US" smtClean="0"/>
+              <a:rPr lang="en-US"/>
               <a:t>Click to edit Master text styles</a:t>
             </a:r>
           </a:p>
           <a:p>
             <a:pPr lvl="1"/>
             <a:r>
-              <a:rPr lang="en-US" smtClean="0"/>
+              <a:rPr lang="en-US"/>
               <a:t>Second level</a:t>
             </a:r>
           </a:p>
           <a:p>
             <a:pPr lvl="2"/>
             <a:r>
-              <a:rPr lang="en-US" smtClean="0"/>
+              <a:rPr lang="en-US"/>
               <a:t>Third level</a:t>
             </a:r>
           </a:p>
           <a:p>
             <a:pPr lvl="3"/>
             <a:r>
-              <a:rPr lang="en-US" smtClean="0"/>
+              <a:rPr lang="en-US"/>
               <a:t>Fourth level</a:t>
             </a:r>
           </a:p>
           <a:p>
             <a:pPr lvl="4"/>
             <a:r>
-              <a:rPr lang="en-US" smtClean="0"/>
+              <a:rPr lang="en-US"/>
               <a:t>Fifth level</a:t>
             </a:r>
-            <a:endParaRPr lang="en-US"/>
           </a:p>
         </p:txBody>
       </p:sp>
@@ -1361,7 +1365,7 @@
           <a:p>
             <a:fld id="{5BCAD085-E8A6-8845-BD4E-CB4CCA059FC4}" type="datetimeFigureOut">
               <a:rPr lang="en-US" smtClean="0"/>
-              <a:t>1/27/13</a:t>
+              <a:t>10/29/2026</a:t>
             </a:fld>
             <a:endParaRPr lang="en-US"/>
           </a:p>
@@ -1459,10 +1463,9 @@
           </a:lstStyle>
           <a:p>
             <a:r>
-              <a:rPr lang="en-US" smtClean="0"/>
+              <a:rPr lang="en-US"/>
               <a:t>Click to edit Master title style</a:t>
             </a:r>
-            <a:endParaRPr lang="en-US"/>
           </a:p>
         </p:txBody>
       </p:sp>
@@ -1525,7 +1528,7 @@
           <a:p>
             <a:pPr lvl="0"/>
             <a:r>
-              <a:rPr lang="en-US" smtClean="0"/>
+              <a:rPr lang="en-US"/>
               <a:t>Click to edit Master text styles</a:t>
             </a:r>
           </a:p>
@@ -1581,38 +1584,37 @@
           <a:p>
             <a:pPr lvl="0"/>
             <a:r>
-              <a:rPr lang="en-US" smtClean="0"/>
+              <a:rPr lang="en-US"/>
               <a:t>Click to edit Master text styles</a:t>
             </a:r>
           </a:p>
           <a:p>
             <a:pPr lvl="1"/>
             <a:r>
-              <a:rPr lang="en-US" smtClean="0"/>
+              <a:rPr lang="en-US"/>
               <a:t>Second level</a:t>
             </a:r>
           </a:p>
           <a:p>
             <a:pPr lvl="2"/>
             <a:r>
-              <a:rPr lang="en-US" smtClean="0"/>
+              <a:rPr lang="en-US"/>
               <a:t>Third level</a:t>
             </a:r>
           </a:p>
           <a:p>
             <a:pPr lvl="3"/>
             <a:r>
-              <a:rPr lang="en-US" smtClean="0"/>
+              <a:rPr lang="en-US"/>
               <a:t>Fourth level</a:t>
             </a:r>
           </a:p>
           <a:p>
             <a:pPr lvl="4"/>
             <a:r>
-              <a:rPr lang="en-US" smtClean="0"/>
+              <a:rPr lang="en-US"/>
               <a:t>Fifth level</a:t>
             </a:r>
-            <a:endParaRPr lang="en-US"/>
           </a:p>
         </p:txBody>
       </p:sp>
@@ -1675,7 +1677,7 @@
           <a:p>
             <a:pPr lvl="0"/>
             <a:r>
-              <a:rPr lang="en-US" smtClean="0"/>
+              <a:rPr lang="en-US"/>
               <a:t>Click to edit Master text styles</a:t>
             </a:r>
           </a:p>
@@ -1731,38 +1733,37 @@
           <a:p>
             <a:pPr lvl="0"/>
             <a:r>
-              <a:rPr lang="en-US" smtClean="0"/>
+              <a:rPr lang="en-US"/>
               <a:t>Click to edit Master text styles</a:t>
             </a:r>
           </a:p>
           <a:p>
             <a:pPr lvl="1"/>
             <a:r>
-              <a:rPr lang="en-US" smtClean="0"/>
+              <a:rPr lang="en-US"/>
               <a:t>Second level</a:t>
             </a:r>
           </a:p>
           <a:p>
             <a:pPr lvl="2"/>
             <a:r>
-              <a:rPr lang="en-US" smtClean="0"/>
+              <a:rPr lang="en-US"/>
               <a:t>Third level</a:t>
             </a:r>
           </a:p>
           <a:p>
             <a:pPr lvl="3"/>
             <a:r>
-              <a:rPr lang="en-US" smtClean="0"/>
+              <a:rPr lang="en-US"/>
               <a:t>Fourth level</a:t>
             </a:r>
           </a:p>
           <a:p>
             <a:pPr lvl="4"/>
             <a:r>
-              <a:rPr lang="en-US" smtClean="0"/>
+              <a:rPr lang="en-US"/>
               <a:t>Fifth level</a:t>
             </a:r>
-            <a:endParaRPr lang="en-US"/>
           </a:p>
         </p:txBody>
       </p:sp>
@@ -1783,7 +1784,7 @@
           <a:p>
             <a:fld id="{5BCAD085-E8A6-8845-BD4E-CB4CCA059FC4}" type="datetimeFigureOut">
               <a:rPr lang="en-US" smtClean="0"/>
-              <a:t>1/27/13</a:t>
+              <a:t>10/29/2026</a:t>
             </a:fld>
             <a:endParaRPr lang="en-US"/>
           </a:p>
@@ -1877,10 +1878,9 @@
           <a:lstStyle/>
           <a:p>
             <a:r>
-              <a:rPr lang="en-US" smtClean="0"/>
+              <a:rPr lang="en-US"/>
               <a:t>Click to edit Master title style</a:t>
             </a:r>
-            <a:endParaRPr lang="en-US"/>
           </a:p>
         </p:txBody>
       </p:sp>
@@ -1901,7 +1901,7 @@
           <a:p>
             <a:fld id="{5BCAD085-E8A6-8845-BD4E-CB4CCA059FC4}" type="datetimeFigureOut">
               <a:rPr lang="en-US" smtClean="0"/>
-              <a:t>1/27/13</a:t>
+              <a:t>10/29/2026</a:t>
             </a:fld>
             <a:endParaRPr lang="en-US"/>
           </a:p>
@@ -1996,7 +1996,7 @@
           <a:p>
             <a:fld id="{5BCAD085-E8A6-8845-BD4E-CB4CCA059FC4}" type="datetimeFigureOut">
               <a:rPr lang="en-US" smtClean="0"/>
-              <a:t>1/27/13</a:t>
+              <a:t>10/29/2026</a:t>
             </a:fld>
             <a:endParaRPr lang="en-US"/>
           </a:p>
@@ -2099,10 +2099,9 @@
           </a:lstStyle>
           <a:p>
             <a:r>
-              <a:rPr lang="en-US" smtClean="0"/>
+              <a:rPr lang="en-US"/>
               <a:t>Click to edit Master title style</a:t>
             </a:r>
-            <a:endParaRPr lang="en-US"/>
           </a:p>
         </p:txBody>
       </p:sp>
@@ -2156,38 +2155,37 @@
           <a:p>
             <a:pPr lvl="0"/>
             <a:r>
-              <a:rPr lang="en-US" smtClean="0"/>
+              <a:rPr lang="en-US"/>
               <a:t>Click to edit Master text styles</a:t>
             </a:r>
           </a:p>
           <a:p>
             <a:pPr lvl="1"/>
             <a:r>
-              <a:rPr lang="en-US" smtClean="0"/>
+              <a:rPr lang="en-US"/>
               <a:t>Second level</a:t>
             </a:r>
           </a:p>
           <a:p>
             <a:pPr lvl="2"/>
             <a:r>
-              <a:rPr lang="en-US" smtClean="0"/>
+              <a:rPr lang="en-US"/>
               <a:t>Third level</a:t>
             </a:r>
           </a:p>
           <a:p>
             <a:pPr lvl="3"/>
             <a:r>
-              <a:rPr lang="en-US" smtClean="0"/>
+              <a:rPr lang="en-US"/>
               <a:t>Fourth level</a:t>
             </a:r>
           </a:p>
           <a:p>
             <a:pPr lvl="4"/>
             <a:r>
-              <a:rPr lang="en-US" smtClean="0"/>
+              <a:rPr lang="en-US"/>
               <a:t>Fifth level</a:t>
             </a:r>
-            <a:endParaRPr lang="en-US"/>
           </a:p>
         </p:txBody>
       </p:sp>
@@ -2250,7 +2248,7 @@
           <a:p>
             <a:pPr lvl="0"/>
             <a:r>
-              <a:rPr lang="en-US" smtClean="0"/>
+              <a:rPr lang="en-US"/>
               <a:t>Click to edit Master text styles</a:t>
             </a:r>
           </a:p>
@@ -2273,7 +2271,7 @@
           <a:p>
             <a:fld id="{5BCAD085-E8A6-8845-BD4E-CB4CCA059FC4}" type="datetimeFigureOut">
               <a:rPr lang="en-US" smtClean="0"/>
-              <a:t>1/27/13</a:t>
+              <a:t>10/29/2026</a:t>
             </a:fld>
             <a:endParaRPr lang="en-US"/>
           </a:p>
@@ -2376,10 +2374,9 @@
           </a:lstStyle>
           <a:p>
             <a:r>
-              <a:rPr lang="en-US" smtClean="0"/>
+              <a:rPr lang="en-US"/>
               <a:t>Click to edit Master title style</a:t>
             </a:r>
-            <a:endParaRPr lang="en-US"/>
           </a:p>
         </p:txBody>
       </p:sp>
@@ -2503,7 +2500,7 @@
           <a:p>
             <a:pPr lvl="0"/>
             <a:r>
-              <a:rPr lang="en-US" smtClean="0"/>
+              <a:rPr lang="en-US"/>
               <a:t>Click to edit Master text styles</a:t>
             </a:r>
           </a:p>
@@ -2526,7 +2523,7 @@
           <a:p>
             <a:fld id="{5BCAD085-E8A6-8845-BD4E-CB4CCA059FC4}" type="datetimeFigureOut">
               <a:rPr lang="en-US" smtClean="0"/>
-              <a:t>1/27/13</a:t>
+              <a:t>10/29/2026</a:t>
             </a:fld>
             <a:endParaRPr lang="en-US"/>
           </a:p>
@@ -2635,10 +2632,9 @@
           <a:lstStyle/>
           <a:p>
             <a:r>
-              <a:rPr lang="en-US" smtClean="0"/>
+              <a:rPr lang="en-US"/>
               <a:t>Click to edit Master title style</a:t>
             </a:r>
-            <a:endParaRPr lang="en-US"/>
           </a:p>
         </p:txBody>
       </p:sp>
@@ -2669,38 +2665,37 @@
           <a:p>
             <a:pPr lvl="0"/>
             <a:r>
-              <a:rPr lang="en-US" smtClean="0"/>
+              <a:rPr lang="en-US"/>
               <a:t>Click to edit Master text styles</a:t>
             </a:r>
           </a:p>
           <a:p>
             <a:pPr lvl="1"/>
             <a:r>
-              <a:rPr lang="en-US" smtClean="0"/>
+              <a:rPr lang="en-US"/>
               <a:t>Second level</a:t>
             </a:r>
           </a:p>
           <a:p>
             <a:pPr lvl="2"/>
             <a:r>
-              <a:rPr lang="en-US" smtClean="0"/>
+              <a:rPr lang="en-US"/>
               <a:t>Third level</a:t>
             </a:r>
           </a:p>
           <a:p>
             <a:pPr lvl="3"/>
             <a:r>
-              <a:rPr lang="en-US" smtClean="0"/>
+              <a:rPr lang="en-US"/>
               <a:t>Fourth level</a:t>
             </a:r>
           </a:p>
           <a:p>
             <a:pPr lvl="4"/>
             <a:r>
-              <a:rPr lang="en-US" smtClean="0"/>
+              <a:rPr lang="en-US"/>
               <a:t>Fifth level</a:t>
             </a:r>
-            <a:endParaRPr lang="en-US"/>
           </a:p>
         </p:txBody>
       </p:sp>
@@ -2739,7 +2734,7 @@
           <a:p>
             <a:fld id="{5BCAD085-E8A6-8845-BD4E-CB4CCA059FC4}" type="datetimeFigureOut">
               <a:rPr lang="en-US" smtClean="0"/>
-              <a:t>1/27/13</a:t>
+              <a:t>10/29/2026</a:t>
             </a:fld>
             <a:endParaRPr lang="en-US"/>
           </a:p>
@@ -3098,7 +3093,7 @@
 </file>
 
 <file path=ppt/slides/slide1.xml><?xml version="1.0" encoding="utf-8"?>
-<p:sld xmlns:a="http://schemas.openxmlformats.org/drawingml/2006/main" xmlns:p="http://schemas.openxmlformats.org/presentationml/2006/main" xmlns:r="http://schemas.openxmlformats.org/officeDocument/2006/relationships">
+<p:sld xmlns:a="http://schemas.openxmlformats.org/drawingml/2006/main" xmlns:r="http://schemas.openxmlformats.org/officeDocument/2006/relationships" xmlns:p="http://schemas.openxmlformats.org/presentationml/2006/main">
   <p:cSld>
     <p:spTree>
       <p:nvGrpSpPr>
@@ -3106,7 +3101,14 @@
         <p:cNvGrpSpPr/>
         <p:nvPr/>
       </p:nvGrpSpPr>
-      <p:grpSpPr/>
+      <p:grpSpPr>
+        <a:xfrm>
+          <a:off x="0" y="0"/>
+          <a:ext cx="0" cy="0"/>
+          <a:chOff x="0" y="0"/>
+          <a:chExt cx="0" cy="0"/>
+        </a:xfrm>
+      </p:grpSpPr>
       <p:sp>
         <p:nvSpPr>
           <p:cNvPr id="2" name="Rectangle 1"/>
@@ -3147,6 +3149,7 @@
           <a:lstStyle/>
           <a:p>
             <a:pPr algn="ctr"/>
+            <a:endParaRPr/>
           </a:p>
         </p:txBody>
       </p:sp>
@@ -3251,11 +3254,11 @@
           </a:fontRef>
         </p:style>
         <p:txBody>
-          <a:bodyPr rtlCol="0" anchor="ctr" wrap="square" lIns="365760" tIns="274320"/>
+          <a:bodyPr wrap="square" lIns="365760" tIns="274320" rtlCol="0" anchor="ctr"/>
           <a:lstStyle/>
           <a:p>
             <a:pPr algn="ctr">
-              <a:defRPr b="1" sz="1100">
+              <a:defRPr sz="1100" b="1">
                 <a:solidFill>
                   <a:srgbClr val="2563EB"/>
                 </a:solidFill>
@@ -3272,7 +3275,7 @@
               </a:spcBef>
             </a:pPr>
             <a:r>
-              <a:rPr b="1" sz="1200">
+              <a:rPr sz="1200" b="1">
                 <a:solidFill>
                   <a:srgbClr val="FFFFFF"/>
                 </a:solidFill>
@@ -3295,7 +3298,7 @@
               </a:spcBef>
             </a:pPr>
             <a:r>
-              <a:rPr b="1" sz="1200">
+              <a:rPr sz="1200" b="1">
                 <a:solidFill>
                   <a:srgbClr val="FFFFFF"/>
                 </a:solidFill>
@@ -3318,7 +3321,7 @@
               </a:spcBef>
             </a:pPr>
             <a:r>
-              <a:rPr b="1" sz="1200">
+              <a:rPr sz="1200" b="1">
                 <a:solidFill>
                   <a:srgbClr val="FFFFFF"/>
                 </a:solidFill>
@@ -3341,7 +3344,7 @@
               </a:spcBef>
             </a:pPr>
             <a:r>
-              <a:rPr b="1" sz="1200">
+              <a:rPr sz="1200" b="1">
                 <a:solidFill>
                   <a:srgbClr val="FFFFFF"/>
                 </a:solidFill>
@@ -3395,11 +3398,11 @@
           </a:fontRef>
         </p:style>
         <p:txBody>
-          <a:bodyPr rtlCol="0" anchor="ctr" wrap="square" lIns="365760" tIns="274320"/>
+          <a:bodyPr wrap="square" lIns="365760" tIns="274320" rtlCol="0" anchor="ctr"/>
           <a:lstStyle/>
           <a:p>
             <a:pPr algn="ctr">
-              <a:defRPr b="1" sz="1100">
+              <a:defRPr sz="1100" b="1">
                 <a:solidFill>
                   <a:srgbClr val="2563EB"/>
                 </a:solidFill>
@@ -3416,7 +3419,7 @@
               </a:spcBef>
             </a:pPr>
             <a:r>
-              <a:rPr b="1" sz="1200">
+              <a:rPr sz="1200" b="1">
                 <a:solidFill>
                   <a:srgbClr val="FFFFFF"/>
                 </a:solidFill>
@@ -3439,7 +3442,7 @@
               </a:spcBef>
             </a:pPr>
             <a:r>
-              <a:rPr b="1" sz="1200">
+              <a:rPr sz="1200" b="1">
                 <a:solidFill>
                   <a:srgbClr val="FFFFFF"/>
                 </a:solidFill>
@@ -3462,7 +3465,7 @@
               </a:spcBef>
             </a:pPr>
             <a:r>
-              <a:rPr b="1" sz="1200">
+              <a:rPr sz="1200" b="1">
                 <a:solidFill>
                   <a:srgbClr val="FFFFFF"/>
                 </a:solidFill>
@@ -3485,7 +3488,7 @@
               </a:spcBef>
             </a:pPr>
             <a:r>
-              <a:rPr b="1" sz="1200">
+              <a:rPr sz="1200" b="1">
                 <a:solidFill>
                   <a:srgbClr val="FFFFFF"/>
                 </a:solidFill>
@@ -3512,7 +3515,7 @@
 </file>
 
 <file path=ppt/slides/slide10.xml><?xml version="1.0" encoding="utf-8"?>
-<p:sld xmlns:a="http://schemas.openxmlformats.org/drawingml/2006/main" xmlns:p="http://schemas.openxmlformats.org/presentationml/2006/main" xmlns:r="http://schemas.openxmlformats.org/officeDocument/2006/relationships">
+<p:sld xmlns:a="http://schemas.openxmlformats.org/drawingml/2006/main" xmlns:r="http://schemas.openxmlformats.org/officeDocument/2006/relationships" xmlns:p="http://schemas.openxmlformats.org/presentationml/2006/main">
   <p:cSld>
     <p:spTree>
       <p:nvGrpSpPr>
@@ -3520,7 +3523,14 @@
         <p:cNvGrpSpPr/>
         <p:nvPr/>
       </p:nvGrpSpPr>
-      <p:grpSpPr/>
+      <p:grpSpPr>
+        <a:xfrm>
+          <a:off x="0" y="0"/>
+          <a:ext cx="0" cy="0"/>
+          <a:chOff x="0" y="0"/>
+          <a:chExt cx="0" cy="0"/>
+        </a:xfrm>
+      </p:grpSpPr>
       <p:sp>
         <p:nvSpPr>
           <p:cNvPr id="2" name="Rectangle 1"/>
@@ -3561,6 +3571,7 @@
           <a:lstStyle/>
           <a:p>
             <a:pPr algn="ctr"/>
+            <a:endParaRPr/>
           </a:p>
         </p:txBody>
       </p:sp>
@@ -3604,6 +3615,7 @@
           <a:lstStyle/>
           <a:p>
             <a:pPr algn="ctr"/>
+            <a:endParaRPr/>
           </a:p>
         </p:txBody>
       </p:sp>
@@ -3697,6 +3709,7 @@
           <a:lstStyle/>
           <a:p>
             <a:pPr algn="ctr"/>
+            <a:endParaRPr/>
           </a:p>
         </p:txBody>
       </p:sp>
@@ -3777,6 +3790,7 @@
           <a:lstStyle/>
           <a:p>
             <a:pPr algn="ctr"/>
+            <a:endParaRPr/>
           </a:p>
         </p:txBody>
       </p:sp>
@@ -3808,7 +3822,7 @@
               </a:spcAft>
             </a:pPr>
             <a:r>
-              <a:rPr b="1" sz="1400">
+              <a:rPr sz="1400" b="1">
                 <a:solidFill>
                   <a:srgbClr val="1B365D"/>
                 </a:solidFill>
@@ -3831,7 +3845,7 @@
               </a:spcAft>
             </a:pPr>
             <a:r>
-              <a:rPr b="1" sz="1400">
+              <a:rPr sz="1400" b="1">
                 <a:solidFill>
                   <a:srgbClr val="1B365D"/>
                 </a:solidFill>
@@ -3854,7 +3868,7 @@
               </a:spcAft>
             </a:pPr>
             <a:r>
-              <a:rPr b="1" sz="1400">
+              <a:rPr sz="1400" b="1">
                 <a:solidFill>
                   <a:srgbClr val="1B365D"/>
                 </a:solidFill>
@@ -3877,7 +3891,7 @@
               </a:spcAft>
             </a:pPr>
             <a:r>
-              <a:rPr b="1" sz="1400">
+              <a:rPr sz="1400" b="1">
                 <a:solidFill>
                   <a:srgbClr val="1B365D"/>
                 </a:solidFill>
@@ -3900,7 +3914,7 @@
               </a:spcAft>
             </a:pPr>
             <a:r>
-              <a:rPr b="1" sz="1400">
+              <a:rPr sz="1400" b="1">
                 <a:solidFill>
                   <a:srgbClr val="1B365D"/>
                 </a:solidFill>
@@ -3923,7 +3937,7 @@
               </a:spcAft>
             </a:pPr>
             <a:r>
-              <a:rPr b="1" sz="1400">
+              <a:rPr sz="1400" b="1">
                 <a:solidFill>
                   <a:srgbClr val="1B365D"/>
                 </a:solidFill>
@@ -3950,7 +3964,7 @@
 </file>
 
 <file path=ppt/slides/slide11.xml><?xml version="1.0" encoding="utf-8"?>
-<p:sld xmlns:a="http://schemas.openxmlformats.org/drawingml/2006/main" xmlns:p="http://schemas.openxmlformats.org/presentationml/2006/main" xmlns:r="http://schemas.openxmlformats.org/officeDocument/2006/relationships">
+<p:sld xmlns:a="http://schemas.openxmlformats.org/drawingml/2006/main" xmlns:r="http://schemas.openxmlformats.org/officeDocument/2006/relationships" xmlns:p="http://schemas.openxmlformats.org/presentationml/2006/main">
   <p:cSld>
     <p:spTree>
       <p:nvGrpSpPr>
@@ -3958,7 +3972,14 @@
         <p:cNvGrpSpPr/>
         <p:nvPr/>
       </p:nvGrpSpPr>
-      <p:grpSpPr/>
+      <p:grpSpPr>
+        <a:xfrm>
+          <a:off x="0" y="0"/>
+          <a:ext cx="0" cy="0"/>
+          <a:chOff x="0" y="0"/>
+          <a:chExt cx="0" cy="0"/>
+        </a:xfrm>
+      </p:grpSpPr>
       <p:sp>
         <p:nvSpPr>
           <p:cNvPr id="2" name="Rectangle 1"/>
@@ -3999,6 +4020,7 @@
           <a:lstStyle/>
           <a:p>
             <a:pPr algn="ctr"/>
+            <a:endParaRPr/>
           </a:p>
         </p:txBody>
       </p:sp>
@@ -4042,6 +4064,7 @@
           <a:lstStyle/>
           <a:p>
             <a:pPr algn="ctr"/>
+            <a:endParaRPr/>
           </a:p>
         </p:txBody>
       </p:sp>
@@ -4135,6 +4158,7 @@
           <a:lstStyle/>
           <a:p>
             <a:pPr algn="ctr"/>
+            <a:endParaRPr/>
           </a:p>
         </p:txBody>
       </p:sp>
@@ -4189,8 +4213,8 @@
         </p:blipFill>
         <p:spPr>
           <a:xfrm>
-            <a:off x="914400" y="1371600"/>
-            <a:ext cx="6217920" cy="11509767"/>
+            <a:off x="2735923" y="461370"/>
+            <a:ext cx="3109861" cy="5756550"/>
           </a:xfrm>
           <a:prstGeom prst="rect">
             <a:avLst/>
@@ -4239,6 +4263,7 @@
           <a:lstStyle/>
           <a:p>
             <a:pPr algn="ctr"/>
+            <a:endParaRPr/>
           </a:p>
         </p:txBody>
       </p:sp>
@@ -4270,7 +4295,7 @@
               </a:spcAft>
             </a:pPr>
             <a:r>
-              <a:rPr b="1" sz="1400">
+              <a:rPr sz="1400" b="1">
                 <a:solidFill>
                   <a:srgbClr val="1B365D"/>
                 </a:solidFill>
@@ -4293,7 +4318,7 @@
               </a:spcAft>
             </a:pPr>
             <a:r>
-              <a:rPr b="1" sz="1400">
+              <a:rPr sz="1400" b="1">
                 <a:solidFill>
                   <a:srgbClr val="1B365D"/>
                 </a:solidFill>
@@ -4316,7 +4341,7 @@
               </a:spcAft>
             </a:pPr>
             <a:r>
-              <a:rPr b="1" sz="1400">
+              <a:rPr sz="1400" b="1">
                 <a:solidFill>
                   <a:srgbClr val="1B365D"/>
                 </a:solidFill>
@@ -4339,7 +4364,7 @@
               </a:spcAft>
             </a:pPr>
             <a:r>
-              <a:rPr b="1" sz="1400">
+              <a:rPr sz="1400" b="1">
                 <a:solidFill>
                   <a:srgbClr val="1B365D"/>
                 </a:solidFill>
@@ -4366,7 +4391,7 @@
 </file>
 
 <file path=ppt/slides/slide12.xml><?xml version="1.0" encoding="utf-8"?>
-<p:sld xmlns:a="http://schemas.openxmlformats.org/drawingml/2006/main" xmlns:p="http://schemas.openxmlformats.org/presentationml/2006/main" xmlns:r="http://schemas.openxmlformats.org/officeDocument/2006/relationships">
+<p:sld xmlns:a="http://schemas.openxmlformats.org/drawingml/2006/main" xmlns:r="http://schemas.openxmlformats.org/officeDocument/2006/relationships" xmlns:p="http://schemas.openxmlformats.org/presentationml/2006/main">
   <p:cSld>
     <p:spTree>
       <p:nvGrpSpPr>
@@ -4374,7 +4399,14 @@
         <p:cNvGrpSpPr/>
         <p:nvPr/>
       </p:nvGrpSpPr>
-      <p:grpSpPr/>
+      <p:grpSpPr>
+        <a:xfrm>
+          <a:off x="0" y="0"/>
+          <a:ext cx="0" cy="0"/>
+          <a:chOff x="0" y="0"/>
+          <a:chExt cx="0" cy="0"/>
+        </a:xfrm>
+      </p:grpSpPr>
       <p:sp>
         <p:nvSpPr>
           <p:cNvPr id="2" name="Rectangle 1"/>
@@ -4415,6 +4447,7 @@
           <a:lstStyle/>
           <a:p>
             <a:pPr algn="ctr"/>
+            <a:endParaRPr/>
           </a:p>
         </p:txBody>
       </p:sp>
@@ -4458,6 +4491,7 @@
           <a:lstStyle/>
           <a:p>
             <a:pPr algn="ctr"/>
+            <a:endParaRPr/>
           </a:p>
         </p:txBody>
       </p:sp>
@@ -4551,6 +4585,7 @@
           <a:lstStyle/>
           <a:p>
             <a:pPr algn="ctr"/>
+            <a:endParaRPr/>
           </a:p>
         </p:txBody>
       </p:sp>
@@ -4655,6 +4690,7 @@
           <a:lstStyle/>
           <a:p>
             <a:pPr algn="ctr"/>
+            <a:endParaRPr/>
           </a:p>
         </p:txBody>
       </p:sp>
@@ -4686,7 +4722,7 @@
               </a:spcAft>
             </a:pPr>
             <a:r>
-              <a:rPr b="1" sz="1400">
+              <a:rPr sz="1400" b="1">
                 <a:solidFill>
                   <a:srgbClr val="1B365D"/>
                 </a:solidFill>
@@ -4709,7 +4745,7 @@
               </a:spcAft>
             </a:pPr>
             <a:r>
-              <a:rPr b="1" sz="1400">
+              <a:rPr sz="1400" b="1">
                 <a:solidFill>
                   <a:srgbClr val="1B365D"/>
                 </a:solidFill>
@@ -4732,7 +4768,7 @@
               </a:spcAft>
             </a:pPr>
             <a:r>
-              <a:rPr b="1" sz="1400">
+              <a:rPr sz="1400" b="1">
                 <a:solidFill>
                   <a:srgbClr val="1B365D"/>
                 </a:solidFill>
@@ -4755,7 +4791,7 @@
               </a:spcAft>
             </a:pPr>
             <a:r>
-              <a:rPr b="1" sz="1400">
+              <a:rPr sz="1400" b="1">
                 <a:solidFill>
                   <a:srgbClr val="1B365D"/>
                 </a:solidFill>
@@ -4778,7 +4814,7 @@
               </a:spcAft>
             </a:pPr>
             <a:r>
-              <a:rPr b="1" sz="1400">
+              <a:rPr sz="1400" b="1">
                 <a:solidFill>
                   <a:srgbClr val="1B365D"/>
                 </a:solidFill>
@@ -4805,7 +4841,7 @@
 </file>
 
 <file path=ppt/slides/slide13.xml><?xml version="1.0" encoding="utf-8"?>
-<p:sld xmlns:a="http://schemas.openxmlformats.org/drawingml/2006/main" xmlns:p="http://schemas.openxmlformats.org/presentationml/2006/main" xmlns:r="http://schemas.openxmlformats.org/officeDocument/2006/relationships">
+<p:sld xmlns:a="http://schemas.openxmlformats.org/drawingml/2006/main" xmlns:r="http://schemas.openxmlformats.org/officeDocument/2006/relationships" xmlns:p="http://schemas.openxmlformats.org/presentationml/2006/main">
   <p:cSld>
     <p:spTree>
       <p:nvGrpSpPr>
@@ -4813,7 +4849,14 @@
         <p:cNvGrpSpPr/>
         <p:nvPr/>
       </p:nvGrpSpPr>
-      <p:grpSpPr/>
+      <p:grpSpPr>
+        <a:xfrm>
+          <a:off x="0" y="0"/>
+          <a:ext cx="0" cy="0"/>
+          <a:chOff x="0" y="0"/>
+          <a:chExt cx="0" cy="0"/>
+        </a:xfrm>
+      </p:grpSpPr>
       <p:sp>
         <p:nvSpPr>
           <p:cNvPr id="2" name="Rectangle 1"/>
@@ -4854,6 +4897,7 @@
           <a:lstStyle/>
           <a:p>
             <a:pPr algn="ctr"/>
+            <a:endParaRPr/>
           </a:p>
         </p:txBody>
       </p:sp>
@@ -4897,6 +4941,7 @@
           <a:lstStyle/>
           <a:p>
             <a:pPr algn="ctr"/>
+            <a:endParaRPr/>
           </a:p>
         </p:txBody>
       </p:sp>
@@ -4990,6 +5035,7 @@
           <a:lstStyle/>
           <a:p>
             <a:pPr algn="ctr"/>
+            <a:endParaRPr/>
           </a:p>
         </p:txBody>
       </p:sp>
@@ -5094,6 +5140,7 @@
           <a:lstStyle/>
           <a:p>
             <a:pPr algn="ctr"/>
+            <a:endParaRPr/>
           </a:p>
         </p:txBody>
       </p:sp>
@@ -5125,7 +5172,7 @@
               </a:spcAft>
             </a:pPr>
             <a:r>
-              <a:rPr b="1" sz="1400">
+              <a:rPr sz="1400" b="1">
                 <a:solidFill>
                   <a:srgbClr val="1B365D"/>
                 </a:solidFill>
@@ -5148,7 +5195,7 @@
               </a:spcAft>
             </a:pPr>
             <a:r>
-              <a:rPr b="1" sz="1400">
+              <a:rPr sz="1400" b="1">
                 <a:solidFill>
                   <a:srgbClr val="1B365D"/>
                 </a:solidFill>
@@ -5171,7 +5218,7 @@
               </a:spcAft>
             </a:pPr>
             <a:r>
-              <a:rPr b="1" sz="1400">
+              <a:rPr sz="1400" b="1">
                 <a:solidFill>
                   <a:srgbClr val="1B365D"/>
                 </a:solidFill>
@@ -5194,7 +5241,7 @@
               </a:spcAft>
             </a:pPr>
             <a:r>
-              <a:rPr b="1" sz="1400">
+              <a:rPr sz="1400" b="1">
                 <a:solidFill>
                   <a:srgbClr val="1B365D"/>
                 </a:solidFill>
@@ -5221,7 +5268,7 @@
 </file>
 
 <file path=ppt/slides/slide14.xml><?xml version="1.0" encoding="utf-8"?>
-<p:sld xmlns:a="http://schemas.openxmlformats.org/drawingml/2006/main" xmlns:p="http://schemas.openxmlformats.org/presentationml/2006/main" xmlns:r="http://schemas.openxmlformats.org/officeDocument/2006/relationships">
+<p:sld xmlns:a="http://schemas.openxmlformats.org/drawingml/2006/main" xmlns:r="http://schemas.openxmlformats.org/officeDocument/2006/relationships" xmlns:p="http://schemas.openxmlformats.org/presentationml/2006/main">
   <p:cSld>
     <p:spTree>
       <p:nvGrpSpPr>
@@ -5229,7 +5276,14 @@
         <p:cNvGrpSpPr/>
         <p:nvPr/>
       </p:nvGrpSpPr>
-      <p:grpSpPr/>
+      <p:grpSpPr>
+        <a:xfrm>
+          <a:off x="0" y="0"/>
+          <a:ext cx="0" cy="0"/>
+          <a:chOff x="0" y="0"/>
+          <a:chExt cx="0" cy="0"/>
+        </a:xfrm>
+      </p:grpSpPr>
       <p:sp>
         <p:nvSpPr>
           <p:cNvPr id="2" name="Rectangle 1"/>
@@ -5270,6 +5324,7 @@
           <a:lstStyle/>
           <a:p>
             <a:pPr algn="ctr"/>
+            <a:endParaRPr/>
           </a:p>
         </p:txBody>
       </p:sp>
@@ -5313,6 +5368,7 @@
           <a:lstStyle/>
           <a:p>
             <a:pPr algn="ctr"/>
+            <a:endParaRPr/>
           </a:p>
         </p:txBody>
       </p:sp>
@@ -5406,6 +5462,7 @@
           <a:lstStyle/>
           <a:p>
             <a:pPr algn="ctr"/>
+            <a:endParaRPr/>
           </a:p>
         </p:txBody>
       </p:sp>
@@ -5510,6 +5567,7 @@
           <a:lstStyle/>
           <a:p>
             <a:pPr algn="ctr"/>
+            <a:endParaRPr/>
           </a:p>
         </p:txBody>
       </p:sp>
@@ -5541,7 +5599,7 @@
               </a:spcAft>
             </a:pPr>
             <a:r>
-              <a:rPr b="1" sz="1400">
+              <a:rPr sz="1400" b="1">
                 <a:solidFill>
                   <a:srgbClr val="1B365D"/>
                 </a:solidFill>
@@ -5564,7 +5622,7 @@
               </a:spcAft>
             </a:pPr>
             <a:r>
-              <a:rPr b="1" sz="1400">
+              <a:rPr sz="1400" b="1">
                 <a:solidFill>
                   <a:srgbClr val="1B365D"/>
                 </a:solidFill>
@@ -5587,7 +5645,7 @@
               </a:spcAft>
             </a:pPr>
             <a:r>
-              <a:rPr b="1" sz="1400">
+              <a:rPr sz="1400" b="1">
                 <a:solidFill>
                   <a:srgbClr val="1B365D"/>
                 </a:solidFill>
@@ -5610,7 +5668,7 @@
               </a:spcAft>
             </a:pPr>
             <a:r>
-              <a:rPr b="1" sz="1400">
+              <a:rPr sz="1400" b="1">
                 <a:solidFill>
                   <a:srgbClr val="1B365D"/>
                 </a:solidFill>
@@ -5633,7 +5691,7 @@
               </a:spcAft>
             </a:pPr>
             <a:r>
-              <a:rPr b="1" sz="1400">
+              <a:rPr sz="1400" b="1">
                 <a:solidFill>
                   <a:srgbClr val="1B365D"/>
                 </a:solidFill>
@@ -5660,7 +5718,7 @@
 </file>
 
 <file path=ppt/slides/slide15.xml><?xml version="1.0" encoding="utf-8"?>
-<p:sld xmlns:a="http://schemas.openxmlformats.org/drawingml/2006/main" xmlns:p="http://schemas.openxmlformats.org/presentationml/2006/main" xmlns:r="http://schemas.openxmlformats.org/officeDocument/2006/relationships">
+<p:sld xmlns:a="http://schemas.openxmlformats.org/drawingml/2006/main" xmlns:r="http://schemas.openxmlformats.org/officeDocument/2006/relationships" xmlns:p="http://schemas.openxmlformats.org/presentationml/2006/main">
   <p:cSld>
     <p:spTree>
       <p:nvGrpSpPr>
@@ -5668,7 +5726,14 @@
         <p:cNvGrpSpPr/>
         <p:nvPr/>
       </p:nvGrpSpPr>
-      <p:grpSpPr/>
+      <p:grpSpPr>
+        <a:xfrm>
+          <a:off x="0" y="0"/>
+          <a:ext cx="0" cy="0"/>
+          <a:chOff x="0" y="0"/>
+          <a:chExt cx="0" cy="0"/>
+        </a:xfrm>
+      </p:grpSpPr>
       <p:sp>
         <p:nvSpPr>
           <p:cNvPr id="2" name="Rectangle 1"/>
@@ -5709,6 +5774,7 @@
           <a:lstStyle/>
           <a:p>
             <a:pPr algn="ctr"/>
+            <a:endParaRPr/>
           </a:p>
         </p:txBody>
       </p:sp>
@@ -5752,6 +5818,7 @@
           <a:lstStyle/>
           <a:p>
             <a:pPr algn="ctr"/>
+            <a:endParaRPr/>
           </a:p>
         </p:txBody>
       </p:sp>
@@ -5845,6 +5912,7 @@
           <a:lstStyle/>
           <a:p>
             <a:pPr algn="ctr"/>
+            <a:endParaRPr/>
           </a:p>
         </p:txBody>
       </p:sp>
@@ -5949,6 +6017,7 @@
           <a:lstStyle/>
           <a:p>
             <a:pPr algn="ctr"/>
+            <a:endParaRPr/>
           </a:p>
         </p:txBody>
       </p:sp>
@@ -5980,7 +6049,7 @@
               </a:spcAft>
             </a:pPr>
             <a:r>
-              <a:rPr b="1" sz="1400">
+              <a:rPr sz="1400" b="1">
                 <a:solidFill>
                   <a:srgbClr val="1B365D"/>
                 </a:solidFill>
@@ -6003,7 +6072,7 @@
               </a:spcAft>
             </a:pPr>
             <a:r>
-              <a:rPr b="1" sz="1400">
+              <a:rPr sz="1400" b="1">
                 <a:solidFill>
                   <a:srgbClr val="1B365D"/>
                 </a:solidFill>
@@ -6026,7 +6095,7 @@
               </a:spcAft>
             </a:pPr>
             <a:r>
-              <a:rPr b="1" sz="1400">
+              <a:rPr sz="1400" b="1">
                 <a:solidFill>
                   <a:srgbClr val="1B365D"/>
                 </a:solidFill>
@@ -6049,7 +6118,7 @@
               </a:spcAft>
             </a:pPr>
             <a:r>
-              <a:rPr b="1" sz="1400">
+              <a:rPr sz="1400" b="1">
                 <a:solidFill>
                   <a:srgbClr val="1B365D"/>
                 </a:solidFill>
@@ -6072,7 +6141,7 @@
               </a:spcAft>
             </a:pPr>
             <a:r>
-              <a:rPr b="1" sz="1400">
+              <a:rPr sz="1400" b="1">
                 <a:solidFill>
                   <a:srgbClr val="1B365D"/>
                 </a:solidFill>
@@ -6099,7 +6168,7 @@
 </file>
 
 <file path=ppt/slides/slide16.xml><?xml version="1.0" encoding="utf-8"?>
-<p:sld xmlns:a="http://schemas.openxmlformats.org/drawingml/2006/main" xmlns:p="http://schemas.openxmlformats.org/presentationml/2006/main" xmlns:r="http://schemas.openxmlformats.org/officeDocument/2006/relationships">
+<p:sld xmlns:a="http://schemas.openxmlformats.org/drawingml/2006/main" xmlns:r="http://schemas.openxmlformats.org/officeDocument/2006/relationships" xmlns:p="http://schemas.openxmlformats.org/presentationml/2006/main">
   <p:cSld>
     <p:spTree>
       <p:nvGrpSpPr>
@@ -6107,7 +6176,14 @@
         <p:cNvGrpSpPr/>
         <p:nvPr/>
       </p:nvGrpSpPr>
-      <p:grpSpPr/>
+      <p:grpSpPr>
+        <a:xfrm>
+          <a:off x="0" y="0"/>
+          <a:ext cx="0" cy="0"/>
+          <a:chOff x="0" y="0"/>
+          <a:chExt cx="0" cy="0"/>
+        </a:xfrm>
+      </p:grpSpPr>
       <p:sp>
         <p:nvSpPr>
           <p:cNvPr id="2" name="Rectangle 1"/>
@@ -6148,6 +6224,7 @@
           <a:lstStyle/>
           <a:p>
             <a:pPr algn="ctr"/>
+            <a:endParaRPr/>
           </a:p>
         </p:txBody>
       </p:sp>
@@ -6191,6 +6268,7 @@
           <a:lstStyle/>
           <a:p>
             <a:pPr algn="ctr"/>
+            <a:endParaRPr/>
           </a:p>
         </p:txBody>
       </p:sp>
@@ -6284,6 +6362,7 @@
           <a:lstStyle/>
           <a:p>
             <a:pPr algn="ctr"/>
+            <a:endParaRPr/>
           </a:p>
         </p:txBody>
       </p:sp>
@@ -6388,6 +6467,7 @@
           <a:lstStyle/>
           <a:p>
             <a:pPr algn="ctr"/>
+            <a:endParaRPr/>
           </a:p>
         </p:txBody>
       </p:sp>
@@ -6419,7 +6499,7 @@
               </a:spcAft>
             </a:pPr>
             <a:r>
-              <a:rPr b="1" sz="1400">
+              <a:rPr sz="1400" b="1">
                 <a:solidFill>
                   <a:srgbClr val="1B365D"/>
                 </a:solidFill>
@@ -6442,7 +6522,7 @@
               </a:spcAft>
             </a:pPr>
             <a:r>
-              <a:rPr b="1" sz="1400">
+              <a:rPr sz="1400" b="1">
                 <a:solidFill>
                   <a:srgbClr val="1B365D"/>
                 </a:solidFill>
@@ -6465,7 +6545,7 @@
               </a:spcAft>
             </a:pPr>
             <a:r>
-              <a:rPr b="1" sz="1400">
+              <a:rPr sz="1400" b="1">
                 <a:solidFill>
                   <a:srgbClr val="1B365D"/>
                 </a:solidFill>
@@ -6488,7 +6568,7 @@
               </a:spcAft>
             </a:pPr>
             <a:r>
-              <a:rPr b="1" sz="1400">
+              <a:rPr sz="1400" b="1">
                 <a:solidFill>
                   <a:srgbClr val="1B365D"/>
                 </a:solidFill>
@@ -6511,7 +6591,7 @@
               </a:spcAft>
             </a:pPr>
             <a:r>
-              <a:rPr b="1" sz="1400">
+              <a:rPr sz="1400" b="1">
                 <a:solidFill>
                   <a:srgbClr val="1B365D"/>
                 </a:solidFill>
@@ -6538,7 +6618,7 @@
 </file>
 
 <file path=ppt/slides/slide17.xml><?xml version="1.0" encoding="utf-8"?>
-<p:sld xmlns:a="http://schemas.openxmlformats.org/drawingml/2006/main" xmlns:p="http://schemas.openxmlformats.org/presentationml/2006/main" xmlns:r="http://schemas.openxmlformats.org/officeDocument/2006/relationships">
+<p:sld xmlns:a="http://schemas.openxmlformats.org/drawingml/2006/main" xmlns:r="http://schemas.openxmlformats.org/officeDocument/2006/relationships" xmlns:p="http://schemas.openxmlformats.org/presentationml/2006/main">
   <p:cSld>
     <p:spTree>
       <p:nvGrpSpPr>
@@ -6546,7 +6626,14 @@
         <p:cNvGrpSpPr/>
         <p:nvPr/>
       </p:nvGrpSpPr>
-      <p:grpSpPr/>
+      <p:grpSpPr>
+        <a:xfrm>
+          <a:off x="0" y="0"/>
+          <a:ext cx="0" cy="0"/>
+          <a:chOff x="0" y="0"/>
+          <a:chExt cx="0" cy="0"/>
+        </a:xfrm>
+      </p:grpSpPr>
       <p:sp>
         <p:nvSpPr>
           <p:cNvPr id="2" name="Rectangle 1"/>
@@ -6587,6 +6674,7 @@
           <a:lstStyle/>
           <a:p>
             <a:pPr algn="ctr"/>
+            <a:endParaRPr/>
           </a:p>
         </p:txBody>
       </p:sp>
@@ -6630,6 +6718,7 @@
           <a:lstStyle/>
           <a:p>
             <a:pPr algn="ctr"/>
+            <a:endParaRPr/>
           </a:p>
         </p:txBody>
       </p:sp>
@@ -6723,6 +6812,7 @@
           <a:lstStyle/>
           <a:p>
             <a:pPr algn="ctr"/>
+            <a:endParaRPr/>
           </a:p>
         </p:txBody>
       </p:sp>
@@ -6803,6 +6893,7 @@
           <a:lstStyle/>
           <a:p>
             <a:pPr algn="ctr"/>
+            <a:endParaRPr/>
           </a:p>
         </p:txBody>
       </p:sp>
@@ -6834,7 +6925,7 @@
               </a:spcAft>
             </a:pPr>
             <a:r>
-              <a:rPr b="1" sz="1400">
+              <a:rPr sz="1400" b="1">
                 <a:solidFill>
                   <a:srgbClr val="1B365D"/>
                 </a:solidFill>
@@ -6857,7 +6948,7 @@
               </a:spcAft>
             </a:pPr>
             <a:r>
-              <a:rPr b="1" sz="1400">
+              <a:rPr sz="1400" b="1">
                 <a:solidFill>
                   <a:srgbClr val="1B365D"/>
                 </a:solidFill>
@@ -6880,7 +6971,7 @@
               </a:spcAft>
             </a:pPr>
             <a:r>
-              <a:rPr b="1" sz="1400">
+              <a:rPr sz="1400" b="1">
                 <a:solidFill>
                   <a:srgbClr val="1B365D"/>
                 </a:solidFill>
@@ -6903,7 +6994,7 @@
               </a:spcAft>
             </a:pPr>
             <a:r>
-              <a:rPr b="1" sz="1400">
+              <a:rPr sz="1400" b="1">
                 <a:solidFill>
                   <a:srgbClr val="1B365D"/>
                 </a:solidFill>
@@ -6926,7 +7017,7 @@
               </a:spcAft>
             </a:pPr>
             <a:r>
-              <a:rPr b="1" sz="1400">
+              <a:rPr sz="1400" b="1">
                 <a:solidFill>
                   <a:srgbClr val="1B365D"/>
                 </a:solidFill>
@@ -6949,7 +7040,7 @@
               </a:spcAft>
             </a:pPr>
             <a:r>
-              <a:rPr b="1" sz="1400">
+              <a:rPr sz="1400" b="1">
                 <a:solidFill>
                   <a:srgbClr val="1B365D"/>
                 </a:solidFill>
@@ -6976,7 +7067,7 @@
 </file>
 
 <file path=ppt/slides/slide18.xml><?xml version="1.0" encoding="utf-8"?>
-<p:sld xmlns:a="http://schemas.openxmlformats.org/drawingml/2006/main" xmlns:p="http://schemas.openxmlformats.org/presentationml/2006/main" xmlns:r="http://schemas.openxmlformats.org/officeDocument/2006/relationships">
+<p:sld xmlns:a="http://schemas.openxmlformats.org/drawingml/2006/main" xmlns:r="http://schemas.openxmlformats.org/officeDocument/2006/relationships" xmlns:p="http://schemas.openxmlformats.org/presentationml/2006/main">
   <p:cSld>
     <p:spTree>
       <p:nvGrpSpPr>
@@ -6984,7 +7075,14 @@
         <p:cNvGrpSpPr/>
         <p:nvPr/>
       </p:nvGrpSpPr>
-      <p:grpSpPr/>
+      <p:grpSpPr>
+        <a:xfrm>
+          <a:off x="0" y="0"/>
+          <a:ext cx="0" cy="0"/>
+          <a:chOff x="0" y="0"/>
+          <a:chExt cx="0" cy="0"/>
+        </a:xfrm>
+      </p:grpSpPr>
       <p:sp>
         <p:nvSpPr>
           <p:cNvPr id="2" name="Rectangle 1"/>
@@ -7025,6 +7123,7 @@
           <a:lstStyle/>
           <a:p>
             <a:pPr algn="ctr"/>
+            <a:endParaRPr/>
           </a:p>
         </p:txBody>
       </p:sp>
@@ -7068,6 +7167,7 @@
           <a:lstStyle/>
           <a:p>
             <a:pPr algn="ctr"/>
+            <a:endParaRPr/>
           </a:p>
         </p:txBody>
       </p:sp>
@@ -7161,6 +7261,7 @@
           <a:lstStyle/>
           <a:p>
             <a:pPr algn="ctr"/>
+            <a:endParaRPr/>
           </a:p>
         </p:txBody>
       </p:sp>
@@ -7241,6 +7342,7 @@
           <a:lstStyle/>
           <a:p>
             <a:pPr algn="ctr"/>
+            <a:endParaRPr/>
           </a:p>
         </p:txBody>
       </p:sp>
@@ -7272,7 +7374,7 @@
               </a:spcAft>
             </a:pPr>
             <a:r>
-              <a:rPr b="1" sz="1400">
+              <a:rPr sz="1400" b="1">
                 <a:solidFill>
                   <a:srgbClr val="1B365D"/>
                 </a:solidFill>
@@ -7295,7 +7397,7 @@
               </a:spcAft>
             </a:pPr>
             <a:r>
-              <a:rPr b="1" sz="1400">
+              <a:rPr sz="1400" b="1">
                 <a:solidFill>
                   <a:srgbClr val="1B365D"/>
                 </a:solidFill>
@@ -7318,7 +7420,7 @@
               </a:spcAft>
             </a:pPr>
             <a:r>
-              <a:rPr b="1" sz="1400">
+              <a:rPr sz="1400" b="1">
                 <a:solidFill>
                   <a:srgbClr val="1B365D"/>
                 </a:solidFill>
@@ -7341,7 +7443,7 @@
               </a:spcAft>
             </a:pPr>
             <a:r>
-              <a:rPr b="1" sz="1400">
+              <a:rPr sz="1400" b="1">
                 <a:solidFill>
                   <a:srgbClr val="1B365D"/>
                 </a:solidFill>
@@ -7364,7 +7466,7 @@
               </a:spcAft>
             </a:pPr>
             <a:r>
-              <a:rPr b="1" sz="1400">
+              <a:rPr sz="1400" b="1">
                 <a:solidFill>
                   <a:srgbClr val="1B365D"/>
                 </a:solidFill>
@@ -7387,7 +7489,7 @@
               </a:spcAft>
             </a:pPr>
             <a:r>
-              <a:rPr b="1" sz="1400">
+              <a:rPr sz="1400" b="1">
                 <a:solidFill>
                   <a:srgbClr val="1B365D"/>
                 </a:solidFill>
@@ -7414,7 +7516,7 @@
 </file>
 
 <file path=ppt/slides/slide19.xml><?xml version="1.0" encoding="utf-8"?>
-<p:sld xmlns:a="http://schemas.openxmlformats.org/drawingml/2006/main" xmlns:p="http://schemas.openxmlformats.org/presentationml/2006/main" xmlns:r="http://schemas.openxmlformats.org/officeDocument/2006/relationships">
+<p:sld xmlns:a="http://schemas.openxmlformats.org/drawingml/2006/main" xmlns:r="http://schemas.openxmlformats.org/officeDocument/2006/relationships" xmlns:p="http://schemas.openxmlformats.org/presentationml/2006/main">
   <p:cSld>
     <p:spTree>
       <p:nvGrpSpPr>
@@ -7422,7 +7524,14 @@
         <p:cNvGrpSpPr/>
         <p:nvPr/>
       </p:nvGrpSpPr>
-      <p:grpSpPr/>
+      <p:grpSpPr>
+        <a:xfrm>
+          <a:off x="0" y="0"/>
+          <a:ext cx="0" cy="0"/>
+          <a:chOff x="0" y="0"/>
+          <a:chExt cx="0" cy="0"/>
+        </a:xfrm>
+      </p:grpSpPr>
       <p:sp>
         <p:nvSpPr>
           <p:cNvPr id="2" name="Rectangle 1"/>
@@ -7463,6 +7572,7 @@
           <a:lstStyle/>
           <a:p>
             <a:pPr algn="ctr"/>
+            <a:endParaRPr/>
           </a:p>
         </p:txBody>
       </p:sp>
@@ -7506,6 +7616,7 @@
           <a:lstStyle/>
           <a:p>
             <a:pPr algn="ctr"/>
+            <a:endParaRPr/>
           </a:p>
         </p:txBody>
       </p:sp>
@@ -7599,6 +7710,7 @@
           <a:lstStyle/>
           <a:p>
             <a:pPr algn="ctr"/>
+            <a:endParaRPr/>
           </a:p>
         </p:txBody>
       </p:sp>
@@ -7679,6 +7791,7 @@
           <a:lstStyle/>
           <a:p>
             <a:pPr algn="ctr"/>
+            <a:endParaRPr/>
           </a:p>
         </p:txBody>
       </p:sp>
@@ -7710,7 +7823,7 @@
               </a:spcAft>
             </a:pPr>
             <a:r>
-              <a:rPr b="1" sz="1400">
+              <a:rPr sz="1400" b="1">
                 <a:solidFill>
                   <a:srgbClr val="1B365D"/>
                 </a:solidFill>
@@ -7733,7 +7846,7 @@
               </a:spcAft>
             </a:pPr>
             <a:r>
-              <a:rPr b="1" sz="1400">
+              <a:rPr sz="1400" b="1">
                 <a:solidFill>
                   <a:srgbClr val="1B365D"/>
                 </a:solidFill>
@@ -7756,7 +7869,7 @@
               </a:spcAft>
             </a:pPr>
             <a:r>
-              <a:rPr b="1" sz="1400">
+              <a:rPr sz="1400" b="1">
                 <a:solidFill>
                   <a:srgbClr val="1B365D"/>
                 </a:solidFill>
@@ -7779,7 +7892,7 @@
               </a:spcAft>
             </a:pPr>
             <a:r>
-              <a:rPr b="1" sz="1400">
+              <a:rPr sz="1400" b="1">
                 <a:solidFill>
                   <a:srgbClr val="1B365D"/>
                 </a:solidFill>
@@ -7802,7 +7915,7 @@
               </a:spcAft>
             </a:pPr>
             <a:r>
-              <a:rPr b="1" sz="1400">
+              <a:rPr sz="1400" b="1">
                 <a:solidFill>
                   <a:srgbClr val="1B365D"/>
                 </a:solidFill>
@@ -7825,7 +7938,7 @@
               </a:spcAft>
             </a:pPr>
             <a:r>
-              <a:rPr b="1" sz="1400">
+              <a:rPr sz="1400" b="1">
                 <a:solidFill>
                   <a:srgbClr val="1B365D"/>
                 </a:solidFill>
@@ -7852,7 +7965,7 @@
 </file>
 
 <file path=ppt/slides/slide2.xml><?xml version="1.0" encoding="utf-8"?>
-<p:sld xmlns:a="http://schemas.openxmlformats.org/drawingml/2006/main" xmlns:p="http://schemas.openxmlformats.org/presentationml/2006/main" xmlns:r="http://schemas.openxmlformats.org/officeDocument/2006/relationships">
+<p:sld xmlns:a="http://schemas.openxmlformats.org/drawingml/2006/main" xmlns:r="http://schemas.openxmlformats.org/officeDocument/2006/relationships" xmlns:p="http://schemas.openxmlformats.org/presentationml/2006/main">
   <p:cSld>
     <p:spTree>
       <p:nvGrpSpPr>
@@ -7860,7 +7973,14 @@
         <p:cNvGrpSpPr/>
         <p:nvPr/>
       </p:nvGrpSpPr>
-      <p:grpSpPr/>
+      <p:grpSpPr>
+        <a:xfrm>
+          <a:off x="0" y="0"/>
+          <a:ext cx="0" cy="0"/>
+          <a:chOff x="0" y="0"/>
+          <a:chExt cx="0" cy="0"/>
+        </a:xfrm>
+      </p:grpSpPr>
       <p:sp>
         <p:nvSpPr>
           <p:cNvPr id="2" name="Rectangle 1"/>
@@ -7901,6 +8021,7 @@
           <a:lstStyle/>
           <a:p>
             <a:pPr algn="ctr"/>
+            <a:endParaRPr/>
           </a:p>
         </p:txBody>
       </p:sp>
@@ -7944,6 +8065,7 @@
           <a:lstStyle/>
           <a:p>
             <a:pPr algn="ctr"/>
+            <a:endParaRPr/>
           </a:p>
         </p:txBody>
       </p:sp>
@@ -8037,6 +8159,7 @@
           <a:lstStyle/>
           <a:p>
             <a:pPr algn="ctr"/>
+            <a:endParaRPr/>
           </a:p>
         </p:txBody>
       </p:sp>
@@ -8117,6 +8240,7 @@
           <a:lstStyle/>
           <a:p>
             <a:pPr algn="ctr"/>
+            <a:endParaRPr/>
           </a:p>
         </p:txBody>
       </p:sp>
@@ -8148,7 +8272,7 @@
               </a:spcAft>
             </a:pPr>
             <a:r>
-              <a:rPr b="1" sz="1400">
+              <a:rPr sz="1400" b="1">
                 <a:solidFill>
                   <a:srgbClr val="1B365D"/>
                 </a:solidFill>
@@ -8171,7 +8295,7 @@
               </a:spcAft>
             </a:pPr>
             <a:r>
-              <a:rPr b="1" sz="1400">
+              <a:rPr sz="1400" b="1">
                 <a:solidFill>
                   <a:srgbClr val="1B365D"/>
                 </a:solidFill>
@@ -8194,7 +8318,7 @@
               </a:spcAft>
             </a:pPr>
             <a:r>
-              <a:rPr b="1" sz="1400">
+              <a:rPr sz="1400" b="1">
                 <a:solidFill>
                   <a:srgbClr val="1B365D"/>
                 </a:solidFill>
@@ -8217,7 +8341,7 @@
               </a:spcAft>
             </a:pPr>
             <a:r>
-              <a:rPr b="1" sz="1400">
+              <a:rPr sz="1400" b="1">
                 <a:solidFill>
                   <a:srgbClr val="1B365D"/>
                 </a:solidFill>
@@ -8240,7 +8364,7 @@
               </a:spcAft>
             </a:pPr>
             <a:r>
-              <a:rPr b="1" sz="1400">
+              <a:rPr sz="1400" b="1">
                 <a:solidFill>
                   <a:srgbClr val="1B365D"/>
                 </a:solidFill>
@@ -8263,7 +8387,7 @@
               </a:spcAft>
             </a:pPr>
             <a:r>
-              <a:rPr b="1" sz="1400">
+              <a:rPr sz="1400" b="1">
                 <a:solidFill>
                   <a:srgbClr val="1B365D"/>
                 </a:solidFill>
@@ -8290,7 +8414,7 @@
 </file>
 
 <file path=ppt/slides/slide20.xml><?xml version="1.0" encoding="utf-8"?>
-<p:sld xmlns:a="http://schemas.openxmlformats.org/drawingml/2006/main" xmlns:p="http://schemas.openxmlformats.org/presentationml/2006/main" xmlns:r="http://schemas.openxmlformats.org/officeDocument/2006/relationships">
+<p:sld xmlns:a="http://schemas.openxmlformats.org/drawingml/2006/main" xmlns:r="http://schemas.openxmlformats.org/officeDocument/2006/relationships" xmlns:p="http://schemas.openxmlformats.org/presentationml/2006/main">
   <p:cSld>
     <p:spTree>
       <p:nvGrpSpPr>
@@ -8298,7 +8422,14 @@
         <p:cNvGrpSpPr/>
         <p:nvPr/>
       </p:nvGrpSpPr>
-      <p:grpSpPr/>
+      <p:grpSpPr>
+        <a:xfrm>
+          <a:off x="0" y="0"/>
+          <a:ext cx="0" cy="0"/>
+          <a:chOff x="0" y="0"/>
+          <a:chExt cx="0" cy="0"/>
+        </a:xfrm>
+      </p:grpSpPr>
       <p:sp>
         <p:nvSpPr>
           <p:cNvPr id="2" name="Rectangle 1"/>
@@ -8339,6 +8470,7 @@
           <a:lstStyle/>
           <a:p>
             <a:pPr algn="ctr"/>
+            <a:endParaRPr/>
           </a:p>
         </p:txBody>
       </p:sp>
@@ -8424,7 +8556,7 @@
 </file>
 
 <file path=ppt/slides/slide3.xml><?xml version="1.0" encoding="utf-8"?>
-<p:sld xmlns:a="http://schemas.openxmlformats.org/drawingml/2006/main" xmlns:p="http://schemas.openxmlformats.org/presentationml/2006/main" xmlns:r="http://schemas.openxmlformats.org/officeDocument/2006/relationships">
+<p:sld xmlns:a="http://schemas.openxmlformats.org/drawingml/2006/main" xmlns:r="http://schemas.openxmlformats.org/officeDocument/2006/relationships" xmlns:p="http://schemas.openxmlformats.org/presentationml/2006/main">
   <p:cSld>
     <p:spTree>
       <p:nvGrpSpPr>
@@ -8432,7 +8564,14 @@
         <p:cNvGrpSpPr/>
         <p:nvPr/>
       </p:nvGrpSpPr>
-      <p:grpSpPr/>
+      <p:grpSpPr>
+        <a:xfrm>
+          <a:off x="0" y="0"/>
+          <a:ext cx="0" cy="0"/>
+          <a:chOff x="0" y="0"/>
+          <a:chExt cx="0" cy="0"/>
+        </a:xfrm>
+      </p:grpSpPr>
       <p:sp>
         <p:nvSpPr>
           <p:cNvPr id="2" name="Rectangle 1"/>
@@ -8473,6 +8612,7 @@
           <a:lstStyle/>
           <a:p>
             <a:pPr algn="ctr"/>
+            <a:endParaRPr/>
           </a:p>
         </p:txBody>
       </p:sp>
@@ -8516,6 +8656,7 @@
           <a:lstStyle/>
           <a:p>
             <a:pPr algn="ctr"/>
+            <a:endParaRPr/>
           </a:p>
         </p:txBody>
       </p:sp>
@@ -8609,6 +8750,7 @@
           <a:lstStyle/>
           <a:p>
             <a:pPr algn="ctr"/>
+            <a:endParaRPr/>
           </a:p>
         </p:txBody>
       </p:sp>
@@ -8689,6 +8831,7 @@
           <a:lstStyle/>
           <a:p>
             <a:pPr algn="ctr"/>
+            <a:endParaRPr/>
           </a:p>
         </p:txBody>
       </p:sp>
@@ -8720,7 +8863,7 @@
               </a:spcAft>
             </a:pPr>
             <a:r>
-              <a:rPr b="1" sz="1400">
+              <a:rPr sz="1400" b="1">
                 <a:solidFill>
                   <a:srgbClr val="1B365D"/>
                 </a:solidFill>
@@ -8743,7 +8886,7 @@
               </a:spcAft>
             </a:pPr>
             <a:r>
-              <a:rPr b="1" sz="1400">
+              <a:rPr sz="1400" b="1">
                 <a:solidFill>
                   <a:srgbClr val="1B365D"/>
                 </a:solidFill>
@@ -8766,7 +8909,7 @@
               </a:spcAft>
             </a:pPr>
             <a:r>
-              <a:rPr b="1" sz="1400">
+              <a:rPr sz="1400" b="1">
                 <a:solidFill>
                   <a:srgbClr val="1B365D"/>
                 </a:solidFill>
@@ -8789,7 +8932,7 @@
               </a:spcAft>
             </a:pPr>
             <a:r>
-              <a:rPr b="1" sz="1400">
+              <a:rPr sz="1400" b="1">
                 <a:solidFill>
                   <a:srgbClr val="1B365D"/>
                 </a:solidFill>
@@ -8812,7 +8955,7 @@
               </a:spcAft>
             </a:pPr>
             <a:r>
-              <a:rPr b="1" sz="1400">
+              <a:rPr sz="1400" b="1">
                 <a:solidFill>
                   <a:srgbClr val="1B365D"/>
                 </a:solidFill>
@@ -8835,7 +8978,7 @@
               </a:spcAft>
             </a:pPr>
             <a:r>
-              <a:rPr b="1" sz="1400">
+              <a:rPr sz="1400" b="1">
                 <a:solidFill>
                   <a:srgbClr val="1B365D"/>
                 </a:solidFill>
@@ -8862,7 +9005,7 @@
 </file>
 
 <file path=ppt/slides/slide4.xml><?xml version="1.0" encoding="utf-8"?>
-<p:sld xmlns:a="http://schemas.openxmlformats.org/drawingml/2006/main" xmlns:p="http://schemas.openxmlformats.org/presentationml/2006/main" xmlns:r="http://schemas.openxmlformats.org/officeDocument/2006/relationships">
+<p:sld xmlns:a="http://schemas.openxmlformats.org/drawingml/2006/main" xmlns:r="http://schemas.openxmlformats.org/officeDocument/2006/relationships" xmlns:p="http://schemas.openxmlformats.org/presentationml/2006/main">
   <p:cSld>
     <p:spTree>
       <p:nvGrpSpPr>
@@ -8870,7 +9013,14 @@
         <p:cNvGrpSpPr/>
         <p:nvPr/>
       </p:nvGrpSpPr>
-      <p:grpSpPr/>
+      <p:grpSpPr>
+        <a:xfrm>
+          <a:off x="0" y="0"/>
+          <a:ext cx="0" cy="0"/>
+          <a:chOff x="0" y="0"/>
+          <a:chExt cx="0" cy="0"/>
+        </a:xfrm>
+      </p:grpSpPr>
       <p:sp>
         <p:nvSpPr>
           <p:cNvPr id="2" name="Rectangle 1"/>
@@ -8911,6 +9061,7 @@
           <a:lstStyle/>
           <a:p>
             <a:pPr algn="ctr"/>
+            <a:endParaRPr/>
           </a:p>
         </p:txBody>
       </p:sp>
@@ -8954,6 +9105,7 @@
           <a:lstStyle/>
           <a:p>
             <a:pPr algn="ctr"/>
+            <a:endParaRPr/>
           </a:p>
         </p:txBody>
       </p:sp>
@@ -9047,6 +9199,7 @@
           <a:lstStyle/>
           <a:p>
             <a:pPr algn="ctr"/>
+            <a:endParaRPr/>
           </a:p>
         </p:txBody>
       </p:sp>
@@ -9127,6 +9280,7 @@
           <a:lstStyle/>
           <a:p>
             <a:pPr algn="ctr"/>
+            <a:endParaRPr/>
           </a:p>
         </p:txBody>
       </p:sp>
@@ -9158,7 +9312,7 @@
               </a:spcAft>
             </a:pPr>
             <a:r>
-              <a:rPr b="1" sz="1400">
+              <a:rPr sz="1400" b="1">
                 <a:solidFill>
                   <a:srgbClr val="1B365D"/>
                 </a:solidFill>
@@ -9181,7 +9335,7 @@
               </a:spcAft>
             </a:pPr>
             <a:r>
-              <a:rPr b="1" sz="1400">
+              <a:rPr sz="1400" b="1">
                 <a:solidFill>
                   <a:srgbClr val="1B365D"/>
                 </a:solidFill>
@@ -9204,7 +9358,7 @@
               </a:spcAft>
             </a:pPr>
             <a:r>
-              <a:rPr b="1" sz="1400">
+              <a:rPr sz="1400" b="1">
                 <a:solidFill>
                   <a:srgbClr val="1B365D"/>
                 </a:solidFill>
@@ -9227,7 +9381,7 @@
               </a:spcAft>
             </a:pPr>
             <a:r>
-              <a:rPr b="1" sz="1400">
+              <a:rPr sz="1400" b="1">
                 <a:solidFill>
                   <a:srgbClr val="1B365D"/>
                 </a:solidFill>
@@ -9250,7 +9404,7 @@
               </a:spcAft>
             </a:pPr>
             <a:r>
-              <a:rPr b="1" sz="1400">
+              <a:rPr sz="1400" b="1">
                 <a:solidFill>
                   <a:srgbClr val="1B365D"/>
                 </a:solidFill>
@@ -9273,7 +9427,7 @@
               </a:spcAft>
             </a:pPr>
             <a:r>
-              <a:rPr b="1" sz="1400">
+              <a:rPr sz="1400" b="1">
                 <a:solidFill>
                   <a:srgbClr val="1B365D"/>
                 </a:solidFill>
@@ -9333,6 +9487,7 @@
           <a:lstStyle/>
           <a:p>
             <a:pPr algn="ctr"/>
+            <a:endParaRPr/>
           </a:p>
         </p:txBody>
       </p:sp>
@@ -9364,7 +9519,7 @@
               </a:spcAft>
             </a:pPr>
             <a:r>
-              <a:rPr b="1" sz="1400">
+              <a:rPr sz="1400" b="1">
                 <a:solidFill>
                   <a:srgbClr val="1B365D"/>
                 </a:solidFill>
@@ -9387,7 +9542,7 @@
               </a:spcAft>
             </a:pPr>
             <a:r>
-              <a:rPr b="1" sz="1400">
+              <a:rPr sz="1400" b="1">
                 <a:solidFill>
                   <a:srgbClr val="1B365D"/>
                 </a:solidFill>
@@ -9410,7 +9565,7 @@
               </a:spcAft>
             </a:pPr>
             <a:r>
-              <a:rPr b="1" sz="1400">
+              <a:rPr sz="1400" b="1">
                 <a:solidFill>
                   <a:srgbClr val="1B365D"/>
                 </a:solidFill>
@@ -9433,7 +9588,7 @@
               </a:spcAft>
             </a:pPr>
             <a:r>
-              <a:rPr b="1" sz="1400">
+              <a:rPr sz="1400" b="1">
                 <a:solidFill>
                   <a:srgbClr val="1B365D"/>
                 </a:solidFill>
@@ -9460,7 +9615,7 @@
 </file>
 
 <file path=ppt/slides/slide5.xml><?xml version="1.0" encoding="utf-8"?>
-<p:sld xmlns:a="http://schemas.openxmlformats.org/drawingml/2006/main" xmlns:p="http://schemas.openxmlformats.org/presentationml/2006/main" xmlns:r="http://schemas.openxmlformats.org/officeDocument/2006/relationships">
+<p:sld xmlns:a="http://schemas.openxmlformats.org/drawingml/2006/main" xmlns:r="http://schemas.openxmlformats.org/officeDocument/2006/relationships" xmlns:p="http://schemas.openxmlformats.org/presentationml/2006/main">
   <p:cSld>
     <p:spTree>
       <p:nvGrpSpPr>
@@ -9468,7 +9623,14 @@
         <p:cNvGrpSpPr/>
         <p:nvPr/>
       </p:nvGrpSpPr>
-      <p:grpSpPr/>
+      <p:grpSpPr>
+        <a:xfrm>
+          <a:off x="0" y="0"/>
+          <a:ext cx="0" cy="0"/>
+          <a:chOff x="0" y="0"/>
+          <a:chExt cx="0" cy="0"/>
+        </a:xfrm>
+      </p:grpSpPr>
       <p:sp>
         <p:nvSpPr>
           <p:cNvPr id="2" name="Rectangle 1"/>
@@ -9509,6 +9671,7 @@
           <a:lstStyle/>
           <a:p>
             <a:pPr algn="ctr"/>
+            <a:endParaRPr/>
           </a:p>
         </p:txBody>
       </p:sp>
@@ -9552,6 +9715,7 @@
           <a:lstStyle/>
           <a:p>
             <a:pPr algn="ctr"/>
+            <a:endParaRPr/>
           </a:p>
         </p:txBody>
       </p:sp>
@@ -9645,6 +9809,7 @@
           <a:lstStyle/>
           <a:p>
             <a:pPr algn="ctr"/>
+            <a:endParaRPr/>
           </a:p>
         </p:txBody>
       </p:sp>
@@ -9725,6 +9890,7 @@
           <a:lstStyle/>
           <a:p>
             <a:pPr algn="ctr"/>
+            <a:endParaRPr/>
           </a:p>
         </p:txBody>
       </p:sp>
@@ -9756,7 +9922,7 @@
               </a:spcAft>
             </a:pPr>
             <a:r>
-              <a:rPr b="1" sz="1400">
+              <a:rPr sz="1400" b="1">
                 <a:solidFill>
                   <a:srgbClr val="1B365D"/>
                 </a:solidFill>
@@ -9779,7 +9945,7 @@
               </a:spcAft>
             </a:pPr>
             <a:r>
-              <a:rPr b="1" sz="1400">
+              <a:rPr sz="1400" b="1">
                 <a:solidFill>
                   <a:srgbClr val="1B365D"/>
                 </a:solidFill>
@@ -9802,7 +9968,7 @@
               </a:spcAft>
             </a:pPr>
             <a:r>
-              <a:rPr b="1" sz="1400">
+              <a:rPr sz="1400" b="1">
                 <a:solidFill>
                   <a:srgbClr val="1B365D"/>
                 </a:solidFill>
@@ -9825,7 +9991,7 @@
               </a:spcAft>
             </a:pPr>
             <a:r>
-              <a:rPr b="1" sz="1400">
+              <a:rPr sz="1400" b="1">
                 <a:solidFill>
                   <a:srgbClr val="1B365D"/>
                 </a:solidFill>
@@ -9848,7 +10014,7 @@
               </a:spcAft>
             </a:pPr>
             <a:r>
-              <a:rPr b="1" sz="1400">
+              <a:rPr sz="1400" b="1">
                 <a:solidFill>
                   <a:srgbClr val="1B365D"/>
                 </a:solidFill>
@@ -9871,7 +10037,7 @@
               </a:spcAft>
             </a:pPr>
             <a:r>
-              <a:rPr b="1" sz="1400">
+              <a:rPr sz="1400" b="1">
                 <a:solidFill>
                   <a:srgbClr val="1B365D"/>
                 </a:solidFill>
@@ -9898,7 +10064,7 @@
 </file>
 
 <file path=ppt/slides/slide6.xml><?xml version="1.0" encoding="utf-8"?>
-<p:sld xmlns:a="http://schemas.openxmlformats.org/drawingml/2006/main" xmlns:p="http://schemas.openxmlformats.org/presentationml/2006/main" xmlns:r="http://schemas.openxmlformats.org/officeDocument/2006/relationships">
+<p:sld xmlns:a="http://schemas.openxmlformats.org/drawingml/2006/main" xmlns:r="http://schemas.openxmlformats.org/officeDocument/2006/relationships" xmlns:p="http://schemas.openxmlformats.org/presentationml/2006/main">
   <p:cSld>
     <p:spTree>
       <p:nvGrpSpPr>
@@ -9906,7 +10072,14 @@
         <p:cNvGrpSpPr/>
         <p:nvPr/>
       </p:nvGrpSpPr>
-      <p:grpSpPr/>
+      <p:grpSpPr>
+        <a:xfrm>
+          <a:off x="0" y="0"/>
+          <a:ext cx="0" cy="0"/>
+          <a:chOff x="0" y="0"/>
+          <a:chExt cx="0" cy="0"/>
+        </a:xfrm>
+      </p:grpSpPr>
       <p:sp>
         <p:nvSpPr>
           <p:cNvPr id="2" name="Rectangle 1"/>
@@ -9947,6 +10120,7 @@
           <a:lstStyle/>
           <a:p>
             <a:pPr algn="ctr"/>
+            <a:endParaRPr/>
           </a:p>
         </p:txBody>
       </p:sp>
@@ -9990,6 +10164,7 @@
           <a:lstStyle/>
           <a:p>
             <a:pPr algn="ctr"/>
+            <a:endParaRPr/>
           </a:p>
         </p:txBody>
       </p:sp>
@@ -10083,6 +10258,7 @@
           <a:lstStyle/>
           <a:p>
             <a:pPr algn="ctr"/>
+            <a:endParaRPr/>
           </a:p>
         </p:txBody>
       </p:sp>
@@ -10163,6 +10339,7 @@
           <a:lstStyle/>
           <a:p>
             <a:pPr algn="ctr"/>
+            <a:endParaRPr/>
           </a:p>
         </p:txBody>
       </p:sp>
@@ -10194,7 +10371,7 @@
               </a:spcAft>
             </a:pPr>
             <a:r>
-              <a:rPr b="1" sz="1400">
+              <a:rPr sz="1400" b="1">
                 <a:solidFill>
                   <a:srgbClr val="1B365D"/>
                 </a:solidFill>
@@ -10217,7 +10394,7 @@
               </a:spcAft>
             </a:pPr>
             <a:r>
-              <a:rPr b="1" sz="1400">
+              <a:rPr sz="1400" b="1">
                 <a:solidFill>
                   <a:srgbClr val="1B365D"/>
                 </a:solidFill>
@@ -10240,7 +10417,7 @@
               </a:spcAft>
             </a:pPr>
             <a:r>
-              <a:rPr b="1" sz="1400">
+              <a:rPr sz="1400" b="1">
                 <a:solidFill>
                   <a:srgbClr val="1B365D"/>
                 </a:solidFill>
@@ -10263,7 +10440,7 @@
               </a:spcAft>
             </a:pPr>
             <a:r>
-              <a:rPr b="1" sz="1400">
+              <a:rPr sz="1400" b="1">
                 <a:solidFill>
                   <a:srgbClr val="1B365D"/>
                 </a:solidFill>
@@ -10286,7 +10463,7 @@
               </a:spcAft>
             </a:pPr>
             <a:r>
-              <a:rPr b="1" sz="1400">
+              <a:rPr sz="1400" b="1">
                 <a:solidFill>
                   <a:srgbClr val="1B365D"/>
                 </a:solidFill>
@@ -10309,7 +10486,7 @@
               </a:spcAft>
             </a:pPr>
             <a:r>
-              <a:rPr b="1" sz="1400">
+              <a:rPr sz="1400" b="1">
                 <a:solidFill>
                   <a:srgbClr val="1B365D"/>
                 </a:solidFill>
@@ -10336,7 +10513,7 @@
 </file>
 
 <file path=ppt/slides/slide7.xml><?xml version="1.0" encoding="utf-8"?>
-<p:sld xmlns:a="http://schemas.openxmlformats.org/drawingml/2006/main" xmlns:p="http://schemas.openxmlformats.org/presentationml/2006/main" xmlns:r="http://schemas.openxmlformats.org/officeDocument/2006/relationships">
+<p:sld xmlns:a="http://schemas.openxmlformats.org/drawingml/2006/main" xmlns:r="http://schemas.openxmlformats.org/officeDocument/2006/relationships" xmlns:p="http://schemas.openxmlformats.org/presentationml/2006/main">
   <p:cSld>
     <p:spTree>
       <p:nvGrpSpPr>
@@ -10344,7 +10521,14 @@
         <p:cNvGrpSpPr/>
         <p:nvPr/>
       </p:nvGrpSpPr>
-      <p:grpSpPr/>
+      <p:grpSpPr>
+        <a:xfrm>
+          <a:off x="0" y="0"/>
+          <a:ext cx="0" cy="0"/>
+          <a:chOff x="0" y="0"/>
+          <a:chExt cx="0" cy="0"/>
+        </a:xfrm>
+      </p:grpSpPr>
       <p:sp>
         <p:nvSpPr>
           <p:cNvPr id="2" name="Rectangle 1"/>
@@ -10385,6 +10569,7 @@
           <a:lstStyle/>
           <a:p>
             <a:pPr algn="ctr"/>
+            <a:endParaRPr/>
           </a:p>
         </p:txBody>
       </p:sp>
@@ -10428,6 +10613,7 @@
           <a:lstStyle/>
           <a:p>
             <a:pPr algn="ctr"/>
+            <a:endParaRPr/>
           </a:p>
         </p:txBody>
       </p:sp>
@@ -10521,6 +10707,7 @@
           <a:lstStyle/>
           <a:p>
             <a:pPr algn="ctr"/>
+            <a:endParaRPr/>
           </a:p>
         </p:txBody>
       </p:sp>
@@ -10601,6 +10788,7 @@
           <a:lstStyle/>
           <a:p>
             <a:pPr algn="ctr"/>
+            <a:endParaRPr/>
           </a:p>
         </p:txBody>
       </p:sp>
@@ -10632,7 +10820,7 @@
               </a:spcAft>
             </a:pPr>
             <a:r>
-              <a:rPr b="1" sz="1400">
+              <a:rPr sz="1400" b="1">
                 <a:solidFill>
                   <a:srgbClr val="1B365D"/>
                 </a:solidFill>
@@ -10655,7 +10843,7 @@
               </a:spcAft>
             </a:pPr>
             <a:r>
-              <a:rPr b="1" sz="1400">
+              <a:rPr sz="1400" b="1">
                 <a:solidFill>
                   <a:srgbClr val="1B365D"/>
                 </a:solidFill>
@@ -10678,7 +10866,7 @@
               </a:spcAft>
             </a:pPr>
             <a:r>
-              <a:rPr b="1" sz="1400">
+              <a:rPr sz="1400" b="1">
                 <a:solidFill>
                   <a:srgbClr val="1B365D"/>
                 </a:solidFill>
@@ -10701,7 +10889,7 @@
               </a:spcAft>
             </a:pPr>
             <a:r>
-              <a:rPr b="1" sz="1400">
+              <a:rPr sz="1400" b="1">
                 <a:solidFill>
                   <a:srgbClr val="1B365D"/>
                 </a:solidFill>
@@ -10724,7 +10912,7 @@
               </a:spcAft>
             </a:pPr>
             <a:r>
-              <a:rPr b="1" sz="1400">
+              <a:rPr sz="1400" b="1">
                 <a:solidFill>
                   <a:srgbClr val="1B365D"/>
                 </a:solidFill>
@@ -10747,7 +10935,7 @@
               </a:spcAft>
             </a:pPr>
             <a:r>
-              <a:rPr b="1" sz="1400">
+              <a:rPr sz="1400" b="1">
                 <a:solidFill>
                   <a:srgbClr val="1B365D"/>
                 </a:solidFill>
@@ -10774,7 +10962,7 @@
 </file>
 
 <file path=ppt/slides/slide8.xml><?xml version="1.0" encoding="utf-8"?>
-<p:sld xmlns:a="http://schemas.openxmlformats.org/drawingml/2006/main" xmlns:p="http://schemas.openxmlformats.org/presentationml/2006/main" xmlns:r="http://schemas.openxmlformats.org/officeDocument/2006/relationships">
+<p:sld xmlns:a="http://schemas.openxmlformats.org/drawingml/2006/main" xmlns:r="http://schemas.openxmlformats.org/officeDocument/2006/relationships" xmlns:p="http://schemas.openxmlformats.org/presentationml/2006/main">
   <p:cSld>
     <p:spTree>
       <p:nvGrpSpPr>
@@ -10782,7 +10970,14 @@
         <p:cNvGrpSpPr/>
         <p:nvPr/>
       </p:nvGrpSpPr>
-      <p:grpSpPr/>
+      <p:grpSpPr>
+        <a:xfrm>
+          <a:off x="0" y="0"/>
+          <a:ext cx="0" cy="0"/>
+          <a:chOff x="0" y="0"/>
+          <a:chExt cx="0" cy="0"/>
+        </a:xfrm>
+      </p:grpSpPr>
       <p:sp>
         <p:nvSpPr>
           <p:cNvPr id="2" name="Rectangle 1"/>
@@ -10823,6 +11018,7 @@
           <a:lstStyle/>
           <a:p>
             <a:pPr algn="ctr"/>
+            <a:endParaRPr/>
           </a:p>
         </p:txBody>
       </p:sp>
@@ -10866,6 +11062,7 @@
           <a:lstStyle/>
           <a:p>
             <a:pPr algn="ctr"/>
+            <a:endParaRPr/>
           </a:p>
         </p:txBody>
       </p:sp>
@@ -10959,6 +11156,7 @@
           <a:lstStyle/>
           <a:p>
             <a:pPr algn="ctr"/>
+            <a:endParaRPr/>
           </a:p>
         </p:txBody>
       </p:sp>
@@ -11039,6 +11237,7 @@
           <a:lstStyle/>
           <a:p>
             <a:pPr algn="ctr"/>
+            <a:endParaRPr/>
           </a:p>
         </p:txBody>
       </p:sp>
@@ -11070,7 +11269,7 @@
               </a:spcAft>
             </a:pPr>
             <a:r>
-              <a:rPr b="1" sz="1400">
+              <a:rPr sz="1400" b="1">
                 <a:solidFill>
                   <a:srgbClr val="1B365D"/>
                 </a:solidFill>
@@ -11093,7 +11292,7 @@
               </a:spcAft>
             </a:pPr>
             <a:r>
-              <a:rPr b="1" sz="1400">
+              <a:rPr sz="1400" b="1">
                 <a:solidFill>
                   <a:srgbClr val="1B365D"/>
                 </a:solidFill>
@@ -11116,7 +11315,7 @@
               </a:spcAft>
             </a:pPr>
             <a:r>
-              <a:rPr b="1" sz="1400">
+              <a:rPr sz="1400" b="1">
                 <a:solidFill>
                   <a:srgbClr val="1B365D"/>
                 </a:solidFill>
@@ -11139,7 +11338,7 @@
               </a:spcAft>
             </a:pPr>
             <a:r>
-              <a:rPr b="1" sz="1400">
+              <a:rPr sz="1400" b="1">
                 <a:solidFill>
                   <a:srgbClr val="1B365D"/>
                 </a:solidFill>
@@ -11162,7 +11361,7 @@
               </a:spcAft>
             </a:pPr>
             <a:r>
-              <a:rPr b="1" sz="1400">
+              <a:rPr sz="1400" b="1">
                 <a:solidFill>
                   <a:srgbClr val="1B365D"/>
                 </a:solidFill>
@@ -11185,7 +11384,7 @@
               </a:spcAft>
             </a:pPr>
             <a:r>
-              <a:rPr b="1" sz="1400">
+              <a:rPr sz="1400" b="1">
                 <a:solidFill>
                   <a:srgbClr val="1B365D"/>
                 </a:solidFill>
@@ -11212,7 +11411,7 @@
 </file>
 
 <file path=ppt/slides/slide9.xml><?xml version="1.0" encoding="utf-8"?>
-<p:sld xmlns:a="http://schemas.openxmlformats.org/drawingml/2006/main" xmlns:p="http://schemas.openxmlformats.org/presentationml/2006/main" xmlns:r="http://schemas.openxmlformats.org/officeDocument/2006/relationships">
+<p:sld xmlns:a="http://schemas.openxmlformats.org/drawingml/2006/main" xmlns:r="http://schemas.openxmlformats.org/officeDocument/2006/relationships" xmlns:p="http://schemas.openxmlformats.org/presentationml/2006/main">
   <p:cSld>
     <p:spTree>
       <p:nvGrpSpPr>
@@ -11220,7 +11419,14 @@
         <p:cNvGrpSpPr/>
         <p:nvPr/>
       </p:nvGrpSpPr>
-      <p:grpSpPr/>
+      <p:grpSpPr>
+        <a:xfrm>
+          <a:off x="0" y="0"/>
+          <a:ext cx="0" cy="0"/>
+          <a:chOff x="0" y="0"/>
+          <a:chExt cx="0" cy="0"/>
+        </a:xfrm>
+      </p:grpSpPr>
       <p:sp>
         <p:nvSpPr>
           <p:cNvPr id="2" name="Rectangle 1"/>
@@ -11261,6 +11467,7 @@
           <a:lstStyle/>
           <a:p>
             <a:pPr algn="ctr"/>
+            <a:endParaRPr/>
           </a:p>
         </p:txBody>
       </p:sp>
@@ -11304,6 +11511,7 @@
           <a:lstStyle/>
           <a:p>
             <a:pPr algn="ctr"/>
+            <a:endParaRPr/>
           </a:p>
         </p:txBody>
       </p:sp>
@@ -11397,6 +11605,7 @@
           <a:lstStyle/>
           <a:p>
             <a:pPr algn="ctr"/>
+            <a:endParaRPr/>
           </a:p>
         </p:txBody>
       </p:sp>
@@ -11477,6 +11686,7 @@
           <a:lstStyle/>
           <a:p>
             <a:pPr algn="ctr"/>
+            <a:endParaRPr/>
           </a:p>
         </p:txBody>
       </p:sp>
@@ -11508,7 +11718,7 @@
               </a:spcAft>
             </a:pPr>
             <a:r>
-              <a:rPr b="1" sz="1400">
+              <a:rPr sz="1400" b="1">
                 <a:solidFill>
                   <a:srgbClr val="1B365D"/>
                 </a:solidFill>
@@ -11531,7 +11741,7 @@
               </a:spcAft>
             </a:pPr>
             <a:r>
-              <a:rPr b="1" sz="1400">
+              <a:rPr sz="1400" b="1">
                 <a:solidFill>
                   <a:srgbClr val="1B365D"/>
                 </a:solidFill>
@@ -11554,7 +11764,7 @@
               </a:spcAft>
             </a:pPr>
             <a:r>
-              <a:rPr b="1" sz="1400">
+              <a:rPr sz="1400" b="1">
                 <a:solidFill>
                   <a:srgbClr val="1B365D"/>
                 </a:solidFill>
@@ -11577,7 +11787,7 @@
               </a:spcAft>
             </a:pPr>
             <a:r>
-              <a:rPr b="1" sz="1400">
+              <a:rPr sz="1400" b="1">
                 <a:solidFill>
                   <a:srgbClr val="1B365D"/>
                 </a:solidFill>
@@ -11600,7 +11810,7 @@
               </a:spcAft>
             </a:pPr>
             <a:r>
-              <a:rPr b="1" sz="1400">
+              <a:rPr sz="1400" b="1">
                 <a:solidFill>
                   <a:srgbClr val="1B365D"/>
                 </a:solidFill>
@@ -11623,7 +11833,7 @@
               </a:spcAft>
             </a:pPr>
             <a:r>
-              <a:rPr b="1" sz="1400">
+              <a:rPr sz="1400" b="1">
                 <a:solidFill>
                   <a:srgbClr val="1B365D"/>
                 </a:solidFill>
